--- a/Proyecto de Investigación 1/Trabajo 1/Presentacion-Kuhn-y-seguridad-informatica.pptx
+++ b/Proyecto de Investigación 1/Trabajo 1/Presentacion-Kuhn-y-seguridad-informatica.pptx
@@ -122,12 +122,12 @@
   <p:extLst>
     <p:ext uri="{521415D9-36F7-43E2-AB2F-B90AF26B5E84}">
       <p14:sectionLst xmlns:p14="http://schemas.microsoft.com/office/powerpoint/2010/main">
-        <p14:section name="Apertura" id="{acfa8abe-0c4e-8b25-df1a-45625a3821a0}">
+        <p14:section name="Apertura" id="{1eb9b74f-c96d-ee4c-cd89-f07193a3d113}">
           <p14:sldIdLst>
             <p14:sldId id="256"/>
           </p14:sldIdLst>
         </p14:section>
-        <p14:section name="Teoría" id="{fc69a40a-bf8c-de8d-e391-6277edae6ec1}">
+        <p14:section name="Teoría" id="{2ed6e2b6-a877-c392-3187-cb531a1a0191}">
           <p14:sldIdLst>
             <p14:sldId id="257"/>
             <p14:sldId id="258"/>
@@ -136,13 +136,13 @@
             <p14:sldId id="261"/>
           </p14:sldIdLst>
         </p14:section>
-        <p14:section name="Aplicación" id="{c2fd57dd-b768-ac1c-9fbe-d9d686ff9e51}">
+        <p14:section name="Aplicación" id="{4d0327b5-09b0-e595-571e-1388e637e4f6}">
           <p14:sldIdLst>
             <p14:sldId id="262"/>
             <p14:sldId id="263"/>
           </p14:sldIdLst>
         </p14:section>
-        <p14:section name="Problema" id="{e9ef2151-d93b-2474-40b4-fa38d8d9166f}">
+        <p14:section name="Problema" id="{edc1c368-72c3-8d5e-a256-65adfe288484}">
           <p14:sldIdLst>
             <p14:sldId id="264"/>
             <p14:sldId id="265"/>
@@ -152,7 +152,7 @@
             <p14:sldId id="269"/>
           </p14:sldIdLst>
         </p14:section>
-        <p14:section name="Cierre" id="{1773fc40-3432-d3dc-6b1c-f84aaf4e62c9}">
+        <p14:section name="Cierre" id="{405dcd5f-92dd-80c3-1584-d0b4f0f60883}">
           <p14:sldIdLst>
             <p14:sldId id="270"/>
             <p14:sldId id="271"/>
@@ -3823,7 +3823,7 @@
                 <a:ea typeface="Calibri" pitchFamily="34" charset="-122"/>
                 <a:cs typeface="Calibri" pitchFamily="34" charset="-120"/>
               </a:rPr>
-              <a:t>Analizar los factores organizacionales que influyen en la adopción de prácticas de seguridad durante el ciclo de desarrollo de software en equipos de empresas medianas del área metropolitana de Guatemala en 2027.</a:t>
+              <a:t>Analizar los factores organizacionales que inciden en la adopción de prácticas de seguridad durante el ciclo de desarrollo de software en equipos de desarrollo de empresas medianas del área metropolitana de Guatemala en el año 2027.</a:t>
             </a:r>
             <a:endParaRPr lang="en-US" sz="1600" dirty="0"/>
           </a:p>

--- a/Proyecto de Investigación 1/Trabajo 1/Presentacion-Kuhn-y-seguridad-informatica.pptx
+++ b/Proyecto de Investigación 1/Trabajo 1/Presentacion-Kuhn-y-seguridad-informatica.pptx
@@ -650,7 +650,7 @@
           <a:p>
             <a:r>
               <a:rPr lang="en-US" dirty="0"/>
-              <a:t>El problema central es que los equipos de desarrollo de empresas medianas del área metropolitana integran de forma limitada y poco documentada la seguridad en su ciclo de desarrollo. Hay tres deficiencias en el conocimiento: no hay datos locales, los factores organizacionales se han estudiado menos que los tecnológicos y faltan instrumentos adaptados a nuestro contexto.</a:t>
+              <a:t>El problema central es que los equipos de desarrollo de empresas medianas del área metropolitana integran de forma limitada y sin documentar la seguridad en su ciclo de desarrollo. Hay tres deficiencias en el conocimiento: no hay datos locales, los factores organizacionales se han estudiado menos que los tecnológicos y faltan instrumentos adaptados a nuestro contexto.</a:t>
             </a:r>
             <a:endParaRPr lang="en-US" dirty="0"/>
           </a:p>
@@ -3645,6 +3645,10 @@
             <a:prstDash val="solid"/>
           </a:ln>
         </p:spPr>
+        <p:txBody>
+          <a:bodyPr/>
+          <a:p/>
+        </p:txBody>
       </p:sp>
       <p:sp>
         <p:nvSpPr>
@@ -3750,6 +3754,10 @@
             <a:prstDash val="solid"/>
           </a:ln>
         </p:spPr>
+        <p:txBody>
+          <a:bodyPr/>
+          <a:p/>
+        </p:txBody>
       </p:sp>
       <p:sp>
         <p:nvSpPr>
@@ -3823,7 +3831,7 @@
                 <a:ea typeface="Calibri" pitchFamily="34" charset="-122"/>
                 <a:cs typeface="Calibri" pitchFamily="34" charset="-120"/>
               </a:rPr>
-              <a:t>Analizar los factores organizacionales que influyen en la adopción de prácticas de seguridad durante el ciclo de desarrollo de software en equipos de empresas medianas del área metropolitana de Guatemala en 2027.</a:t>
+              <a:t>Analizar los factores organizacionales que inciden en la adopción de prácticas de seguridad durante el ciclo de desarrollo de software en equipos de desarrollo de empresas medianas del área metropolitana de Guatemala en el año 2027.</a:t>
             </a:r>
             <a:endParaRPr lang="en-US" sz="1600" dirty="0"/>
           </a:p>
@@ -3855,6 +3863,10 @@
             <a:prstDash val="solid"/>
           </a:ln>
         </p:spPr>
+        <p:txBody>
+          <a:bodyPr/>
+          <a:p/>
+        </p:txBody>
       </p:sp>
       <p:sp>
         <p:nvSpPr>
@@ -3919,6 +3931,10 @@
             <a:prstDash val="solid"/>
           </a:ln>
         </p:spPr>
+        <p:txBody>
+          <a:bodyPr/>
+          <a:p/>
+        </p:txBody>
       </p:sp>
       <p:sp>
         <p:nvSpPr>
@@ -4022,6 +4038,10 @@
             <a:prstDash val="solid"/>
           </a:ln>
         </p:spPr>
+        <p:txBody>
+          <a:bodyPr/>
+          <a:p/>
+        </p:txBody>
       </p:sp>
       <p:sp>
         <p:nvSpPr>
@@ -4125,6 +4145,10 @@
             <a:prstDash val="solid"/>
           </a:ln>
         </p:spPr>
+        <p:txBody>
+          <a:bodyPr/>
+          <a:p/>
+        </p:txBody>
       </p:sp>
       <p:sp>
         <p:nvSpPr>
@@ -5427,7 +5451,7 @@
                 <a:ea typeface="Calibri" pitchFamily="34" charset="-122"/>
                 <a:cs typeface="Calibri" pitchFamily="34" charset="-120"/>
               </a:rPr>
-              <a:t>Mastercard. (2025, agosto). Guatemala avanza en su digitalización: Mastercard presenta hallazgos clave sobre ciberseguridad [Comunicado de prensa]. https://www.mastercard.com</a:t>
+              <a:t>Mastercard. (2025, agosto). Guatemala avanza en su digitalización: Mastercard presenta hallazgos clave sobre ciberseguridad y refuerza su compromiso con la protección del ecosistema digital en el país [Comunicado de prensa]. https://www.mastercard.com/ar/es/news-and-trends/press/2025/august/guatemala-avanza-en-su-digitalizacion-mastercard-presenta-hallazgos-clave-sobre-ciberseguridad-y-refuerza-su-compromiso-con-la-proteccion-del-ecosistema-digital-en-el-pais.html</a:t>
             </a:r>
             <a:endParaRPr lang="en-US" sz="1100" dirty="0"/>
           </a:p>
@@ -5509,7 +5533,7 @@
                 <a:ea typeface="Calibri" pitchFamily="34" charset="-122"/>
                 <a:cs typeface="Calibri" pitchFamily="34" charset="-120"/>
               </a:rPr>
-              <a:t>Rose, S., Borchert, O., Mitchell, S., &amp; Connelly, S. (2020). Zero trust architecture (NIST SP 800-207). NIST. https://doi.org/10.6028/NIST.SP.800-207</a:t>
+              <a:t>Rose, S., Borchert, O., Mitchell, S., &amp; Connelly, S. (2020). Zero trust architecture (NIST Special Publication 800-207). National Institute of Standards and Technology. https://doi.org/10.6028/NIST.SP.800-207</a:t>
             </a:r>
             <a:endParaRPr lang="en-US" sz="1100" dirty="0"/>
           </a:p>
@@ -5529,7 +5553,7 @@
                 <a:ea typeface="Calibri" pitchFamily="34" charset="-122"/>
                 <a:cs typeface="Calibri" pitchFamily="34" charset="-120"/>
               </a:rPr>
-              <a:t>RSM Guatemala. (s. f.). Estatus de la iniciativa de Ley 6347 en Guatemala. https://www.rsm.global/guatemala/es/insights/ley-de-ciberseguridad-guatemala</a:t>
+              <a:t>RSM Guatemala. (s. f.). Estatus de la iniciativa de Ley 6347 en Guatemala: Un avance hacia la ciberseguridad nacional. https://www.rsm.global/guatemala/es/insights/ley-de-ciberseguridad-guatemala</a:t>
             </a:r>
             <a:endParaRPr lang="en-US" sz="1100" dirty="0"/>
           </a:p>
@@ -5549,7 +5573,7 @@
                 <a:ea typeface="Calibri" pitchFamily="34" charset="-122"/>
                 <a:cs typeface="Calibri" pitchFamily="34" charset="-120"/>
               </a:rPr>
-              <a:t>Souppaya, M., Scarfone, K., &amp; Dodson, D. (2022). Secure software development framework (SSDF) version 1.1 (NIST SP 800-218). NIST. https://doi.org/10.6028/NIST.SP.800-218</a:t>
+              <a:t>Souppaya, M., Scarfone, K., &amp; Dodson, D. (2022). Secure software development framework (SSDF) version 1.1: Recommendations for mitigating the risk of software vulnerabilities (NIST Special Publication 800-218). National Institute of Standards and Technology. https://doi.org/10.6028/NIST.SP.800-218</a:t>
             </a:r>
             <a:endParaRPr lang="en-US" sz="1100" dirty="0"/>
           </a:p>
@@ -5569,7 +5593,7 @@
                 <a:ea typeface="Calibri" pitchFamily="34" charset="-122"/>
                 <a:cs typeface="Calibri" pitchFamily="34" charset="-120"/>
               </a:rPr>
-              <a:t>Veracode. (2026). 2026 state of software security report. https://www.veracode.com</a:t>
+              <a:t>Veracode. (2026). 2026 state of software security report. https://www.veracode.com/wp-content/uploads/2026-State-of-Software-Security-Report.pdf</a:t>
             </a:r>
             <a:endParaRPr lang="en-US" sz="1100" dirty="0"/>
           </a:p>

--- a/Proyecto de Investigación 1/Trabajo 1/Presentacion-Kuhn-y-seguridad-informatica.pptx
+++ b/Proyecto de Investigación 1/Trabajo 1/Presentacion-Kuhn-y-seguridad-informatica.pptx
@@ -4,6 +4,9 @@
   <p:sldMasterIdLst>
     <p:sldMasterId id="2147483648" r:id="rId1"/>
   </p:sldMasterIdLst>
+  <p:notesMasterIdLst>
+    <p:notesMasterId r:id="rId18"/>
+  </p:notesMasterIdLst>
   <p:sldIdLst>
     <p:sldId id="256" r:id="rId2"/>
     <p:sldId id="257" r:id="rId3"/>
@@ -22,9 +25,6 @@
     <p:sldId id="270" r:id="rId16"/>
     <p:sldId id="271" r:id="rId17"/>
   </p:sldIdLst>
-  <p:notesMasterIdLst>
-    <p:notesMasterId r:id="rId18"/>
-  </p:notesMasterIdLst>
   <p:sldSz cx="12192000" cy="6858000"/>
   <p:notesSz cx="6858000" cy="12192000"/>
   <p:defaultTextStyle>
@@ -122,12 +122,12 @@
   <p:extLst>
     <p:ext uri="{521415D9-36F7-43E2-AB2F-B90AF26B5E84}">
       <p14:sectionLst xmlns:p14="http://schemas.microsoft.com/office/powerpoint/2010/main">
-        <p14:section name="Apertura" id="{acfa8abe-0c4e-8b25-df1a-45625a3821a0}">
+        <p14:section name="Apertura" id="{ACFA8ABE-0C4E-8B25-DF1A-45625A3821A0}">
           <p14:sldIdLst>
             <p14:sldId id="256"/>
           </p14:sldIdLst>
         </p14:section>
-        <p14:section name="Teoría" id="{fc69a40a-bf8c-de8d-e391-6277edae6ec1}">
+        <p14:section name="Teoría" id="{FC69A40A-BF8C-DE8D-E391-6277EDAE6EC1}">
           <p14:sldIdLst>
             <p14:sldId id="257"/>
             <p14:sldId id="258"/>
@@ -136,13 +136,13 @@
             <p14:sldId id="261"/>
           </p14:sldIdLst>
         </p14:section>
-        <p14:section name="Aplicación" id="{c2fd57dd-b768-ac1c-9fbe-d9d686ff9e51}">
+        <p14:section name="Aplicación" id="{C2FD57DD-B768-AC1C-9FBE-D9D686FF9E51}">
           <p14:sldIdLst>
             <p14:sldId id="262"/>
             <p14:sldId id="263"/>
           </p14:sldIdLst>
         </p14:section>
-        <p14:section name="Problema" id="{e9ef2151-d93b-2474-40b4-fa38d8d9166f}">
+        <p14:section name="Problema" id="{E9EF2151-D93B-2474-40B4-FA38D8D9166F}">
           <p14:sldIdLst>
             <p14:sldId id="264"/>
             <p14:sldId id="265"/>
@@ -152,7 +152,7 @@
             <p14:sldId id="269"/>
           </p14:sldIdLst>
         </p14:section>
-        <p14:section name="Cierre" id="{1773fc40-3432-d3dc-6b1c-f84aaf4e62c9}">
+        <p14:section name="Cierre" id="{1773FC40-3432-D3DC-6B1C-F84AAF4E62C9}">
           <p14:sldIdLst>
             <p14:sldId id="270"/>
             <p14:sldId id="271"/>
@@ -189,234 +189,10 @@
           <a:chExt cx="0" cy="0"/>
         </a:xfrm>
       </p:grpSpPr>
-      <p:sp>
-        <p:nvSpPr>
-          <p:cNvPr id="2" name="Header Placeholder 1"/>
-          <p:cNvSpPr>
-            <a:spLocks noGrp="1"/>
-          </p:cNvSpPr>
-          <p:nvPr>
-            <p:ph type="hdr" sz="quarter"/>
-          </p:nvPr>
-        </p:nvSpPr>
-        <p:spPr>
-          <a:xfrm>
-            <a:off x="0" y="0"/>
-            <a:ext cx="2971800" cy="458788"/>
-          </a:xfrm>
-          <a:prstGeom prst="rect">
-            <a:avLst/>
-          </a:prstGeom>
-        </p:spPr>
-        <p:txBody>
-          <a:bodyPr vert="horz" lIns="91440" tIns="45720" rIns="91440" bIns="45720" rtlCol="0"/>
-          <a:lstStyle>
-            <a:lvl1pPr algn="l">
-              <a:defRPr sz="1200"/>
-            </a:lvl1pPr>
-          </a:lstStyle>
-          <a:p>
-            <a:endParaRPr lang="en-US"/>
-          </a:p>
-        </p:txBody>
-      </p:sp>
-      <p:sp>
-        <p:nvSpPr>
-          <p:cNvPr id="3" name="Date Placeholder 2"/>
-          <p:cNvSpPr>
-            <a:spLocks noGrp="1"/>
-          </p:cNvSpPr>
-          <p:nvPr>
-            <p:ph type="dt" idx="1"/>
-          </p:nvPr>
-        </p:nvSpPr>
-        <p:spPr>
-          <a:xfrm>
-            <a:off x="3884613" y="0"/>
-            <a:ext cx="2971800" cy="458788"/>
-          </a:xfrm>
-          <a:prstGeom prst="rect">
-            <a:avLst/>
-          </a:prstGeom>
-        </p:spPr>
-        <p:txBody>
-          <a:bodyPr vert="horz" lIns="91440" tIns="45720" rIns="91440" bIns="45720" rtlCol="0"/>
-          <a:lstStyle>
-            <a:lvl1pPr algn="r">
-              <a:defRPr sz="1200"/>
-            </a:lvl1pPr>
-          </a:lstStyle>
-          <a:p>
-            <a:fld id="{5282F153-3F37-0F45-9E97-73ACFA13230C}" type="datetimeFigureOut">
-              <a:rPr lang="en-US"/>
-              <a:t>7/23/19</a:t>
-            </a:fld>
-            <a:endParaRPr lang="en-US"/>
-          </a:p>
-        </p:txBody>
-      </p:sp>
-      <p:sp>
-        <p:nvSpPr>
-          <p:cNvPr id="4" name="Slide Image Placeholder 3"/>
-          <p:cNvSpPr>
-            <a:spLocks noGrp="1" noRot="1" noChangeAspect="1"/>
-          </p:cNvSpPr>
-          <p:nvPr>
-            <p:ph type="sldImg" idx="2"/>
-          </p:nvPr>
-        </p:nvSpPr>
-        <p:spPr>
-          <a:xfrm>
-            <a:off x="685800" y="1143000"/>
-            <a:ext cx="5486400" cy="3086100"/>
-          </a:xfrm>
-          <a:prstGeom prst="rect">
-            <a:avLst/>
-          </a:prstGeom>
-          <a:noFill/>
-          <a:ln w="12700">
-            <a:solidFill>
-              <a:prstClr val="black"/>
-            </a:solidFill>
-          </a:ln>
-        </p:spPr>
-        <p:txBody>
-          <a:bodyPr vert="horz" lIns="91440" tIns="45720" rIns="91440" bIns="45720" rtlCol="0" anchor="ctr"/>
-          <a:lstStyle/>
-          <a:p>
-            <a:endParaRPr lang="en-US"/>
-          </a:p>
-        </p:txBody>
-      </p:sp>
-      <p:sp>
-        <p:nvSpPr>
-          <p:cNvPr id="5" name="Notes Placeholder 4"/>
-          <p:cNvSpPr>
-            <a:spLocks noGrp="1"/>
-          </p:cNvSpPr>
-          <p:nvPr>
-            <p:ph type="body" sz="quarter" idx="3"/>
-          </p:nvPr>
-        </p:nvSpPr>
-        <p:spPr>
-          <a:xfrm>
-            <a:off x="685800" y="4400550"/>
-            <a:ext cx="5486400" cy="3600450"/>
-          </a:xfrm>
-          <a:prstGeom prst="rect">
-            <a:avLst/>
-          </a:prstGeom>
-        </p:spPr>
-        <p:txBody>
-          <a:bodyPr vert="horz" lIns="91440" tIns="45720" rIns="91440" bIns="45720" rtlCol="0"/>
-          <a:lstStyle/>
-          <a:p>
-            <a:pPr lvl="0"/>
-            <a:r>
-              <a:rPr lang="en-US"/>
-              <a:t>Click to edit Master text styles</a:t>
-            </a:r>
-          </a:p>
-          <a:p>
-            <a:pPr lvl="1"/>
-            <a:r>
-              <a:rPr lang="en-US"/>
-              <a:t>Second level</a:t>
-            </a:r>
-          </a:p>
-          <a:p>
-            <a:pPr lvl="2"/>
-            <a:r>
-              <a:rPr lang="en-US"/>
-              <a:t>Third level</a:t>
-            </a:r>
-          </a:p>
-          <a:p>
-            <a:pPr lvl="3"/>
-            <a:r>
-              <a:rPr lang="en-US"/>
-              <a:t>Fourth level</a:t>
-            </a:r>
-          </a:p>
-          <a:p>
-            <a:pPr lvl="4"/>
-            <a:r>
-              <a:rPr lang="en-US"/>
-              <a:t>Fifth level</a:t>
-            </a:r>
-          </a:p>
-        </p:txBody>
-      </p:sp>
-      <p:sp>
-        <p:nvSpPr>
-          <p:cNvPr id="6" name="Footer Placeholder 5"/>
-          <p:cNvSpPr>
-            <a:spLocks noGrp="1"/>
-          </p:cNvSpPr>
-          <p:nvPr>
-            <p:ph type="ftr" sz="quarter" idx="4"/>
-          </p:nvPr>
-        </p:nvSpPr>
-        <p:spPr>
-          <a:xfrm>
-            <a:off x="0" y="8685213"/>
-            <a:ext cx="2971800" cy="458787"/>
-          </a:xfrm>
-          <a:prstGeom prst="rect">
-            <a:avLst/>
-          </a:prstGeom>
-        </p:spPr>
-        <p:txBody>
-          <a:bodyPr vert="horz" lIns="91440" tIns="45720" rIns="91440" bIns="45720" rtlCol="0" anchor="b"/>
-          <a:lstStyle>
-            <a:lvl1pPr algn="l">
-              <a:defRPr sz="1200"/>
-            </a:lvl1pPr>
-          </a:lstStyle>
-          <a:p>
-            <a:endParaRPr lang="en-US"/>
-          </a:p>
-        </p:txBody>
-      </p:sp>
-      <p:sp>
-        <p:nvSpPr>
-          <p:cNvPr id="7" name="Slide Number Placeholder 6"/>
-          <p:cNvSpPr>
-            <a:spLocks noGrp="1"/>
-          </p:cNvSpPr>
-          <p:nvPr>
-            <p:ph type="sldNum" sz="quarter" idx="5"/>
-          </p:nvPr>
-        </p:nvSpPr>
-        <p:spPr>
-          <a:xfrm>
-            <a:off x="3884613" y="8685213"/>
-            <a:ext cx="2971800" cy="458787"/>
-          </a:xfrm>
-          <a:prstGeom prst="rect">
-            <a:avLst/>
-          </a:prstGeom>
-        </p:spPr>
-        <p:txBody>
-          <a:bodyPr vert="horz" lIns="91440" tIns="45720" rIns="91440" bIns="45720" rtlCol="0" anchor="b"/>
-          <a:lstStyle>
-            <a:lvl1pPr algn="r">
-              <a:defRPr sz="1200"/>
-            </a:lvl1pPr>
-          </a:lstStyle>
-          <a:p>
-            <a:fld id="{CE5E9CC1-C706-0F49-92D6-E571CC5EEA8F}" type="slidenum">
-              <a:rPr lang="en-US"/>
-              <a:t>‹#›</a:t>
-            </a:fld>
-            <a:endParaRPr lang="en-US"/>
-          </a:p>
-        </p:txBody>
-      </p:sp>
     </p:spTree>
     <p:extLst>
       <p:ext uri="{BB962C8B-B14F-4D97-AF65-F5344CB8AC3E}">
-        <p14:creationId xmlns:p14="http://schemas.microsoft.com/office/powerpoint/2010/main" val="1024086991"/>
+        <p14:creationId xmlns:p14="http://schemas.microsoft.com/office/powerpoint/2010/main" val="1932677116"/>
       </p:ext>
     </p:extLst>
   </p:cSld>
@@ -564,7 +340,6 @@
               <a:rPr lang="en-US" dirty="0"/>
               <a:t>Buenas noches. Mi nombre es Gerbert García. Voy a presentar la teoría de los paradigmas de Thomas Kuhn y a mostrar cómo sirve para entender un problema real de la seguridad del software. Al final planteo el problema de investigación que propongo para el curso.</a:t>
             </a:r>
-            <a:endParaRPr lang="en-US" dirty="0"/>
           </a:p>
         </p:txBody>
       </p:sp>
@@ -652,7 +427,6 @@
               <a:rPr lang="en-US" dirty="0"/>
               <a:t>El problema central es que los equipos de desarrollo de empresas medianas del área metropolitana integran de forma limitada y sin documentar la seguridad en su ciclo de desarrollo. Hay tres deficiencias en el conocimiento: no hay datos locales, los factores organizacionales se han estudiado menos que los tecnológicos y faltan instrumentos adaptados a nuestro contexto.</a:t>
             </a:r>
-            <a:endParaRPr lang="en-US" dirty="0"/>
           </a:p>
         </p:txBody>
       </p:sp>
@@ -740,7 +514,6 @@
               <a:rPr lang="en-US" dirty="0"/>
               <a:t>En el árbol de problemas, el tronco es el problema central. Las raíces son cinco causas: capacitación insuficiente, plazos de entrega que desplazan la seguridad, políticas débiles, la persistencia del enfoque de seguridad al final y poco conocimiento o costo de las herramientas. Las ramas son los efectos: vulnerabilidades en producción, mayor costo de corrección, más exposición a incidentes y pérdida de confianza.</a:t>
             </a:r>
-            <a:endParaRPr lang="en-US" dirty="0"/>
           </a:p>
         </p:txBody>
       </p:sp>
@@ -828,7 +601,6 @@
               <a:rPr lang="en-US" dirty="0"/>
               <a:t>Al convertir el árbol de problemas en árbol de objetivos, cada causa pasa a ser un medio y cada efecto un fin. El problema central se convierte en el objetivo central: comprender los factores organizacionales que condicionan la adopción de prácticas de seguridad.</a:t>
             </a:r>
-            <a:endParaRPr lang="en-US" dirty="0"/>
           </a:p>
         </p:txBody>
       </p:sp>
@@ -916,7 +688,6 @@
               <a:rPr lang="en-US" dirty="0"/>
               <a:t>La pregunta de investigación sigue la fórmula vista en clase: pregunta guía, variables, población, espacio y tiempo. El objetivo general es analizar esos factores organizacionales. Los tres específicos: identificar las prácticas que ya aplican, describir las barreras que perciben y determinar la relación entre capacitación y adopción.</a:t>
             </a:r>
-            <a:endParaRPr lang="en-US" dirty="0"/>
           </a:p>
         </p:txBody>
       </p:sp>
@@ -1004,7 +775,6 @@
               <a:rPr lang="en-US" dirty="0"/>
               <a:t>La justificación tiene tres perspectivas. La teórica aplica la teoría de Kuhn y aporta evidencia local. La metodológica propone un instrumento basado en el marco SSDF. La práctica orienta decisiones de capacitación, políticas y herramientas. En cuanto a la viabilidad, el estudio es viable; el único factor condicionado es el acceso a los participantes, que se atiende con participación voluntaria y anónima.</a:t>
             </a:r>
-            <a:endParaRPr lang="en-US" dirty="0"/>
           </a:p>
         </p:txBody>
       </p:sp>
@@ -1092,7 +862,6 @@
               <a:rPr lang="en-US" dirty="0"/>
               <a:t>Para cerrar: la teoría de Kuhn da un lenguaje para entender por qué un cambio técnico encuentra resistencia. La evidencia internacional muestra que el enfoque tradicional ya no alcanza. Y en Guatemala falta evidencia local sobre qué frena la adopción del desarrollo seguro; ese es el vacío que propone llenar esta investigación. Muchas gracias.</a:t>
             </a:r>
-            <a:endParaRPr lang="en-US" dirty="0"/>
           </a:p>
         </p:txBody>
       </p:sp>
@@ -1176,10 +945,6 @@
           <a:bodyPr/>
           <a:lstStyle/>
           <a:p>
-            <a:r>
-              <a:rPr lang="en-US" dirty="0"/>
-              <a:t/>
-            </a:r>
             <a:endParaRPr lang="en-US" dirty="0"/>
           </a:p>
         </p:txBody>
@@ -1268,7 +1033,6 @@
               <a:rPr lang="en-US" dirty="0"/>
               <a:t>La exposición tiene tres partes. Primero, la teoría de Kuhn y una lectura crítica. Segundo, su aplicación al cambio que vive hoy la seguridad del software. Tercero, el problema de investigación que surge de esa aplicación.</a:t>
             </a:r>
-            <a:endParaRPr lang="en-US" dirty="0"/>
           </a:p>
         </p:txBody>
       </p:sp>
@@ -1356,7 +1120,6 @@
               <a:rPr lang="en-US" dirty="0"/>
               <a:t>Kuhn se opone a la idea de que la ciencia progresa de forma lineal y acumulativa. Para él, el progreso ocurre por etapas separadas por rupturas. Además introduce la inconmensurabilidad: no se puede juzgar una teoría antigua con los criterios de la actual, porque cada paradigma organiza la realidad de otra manera.</a:t>
             </a:r>
-            <a:endParaRPr lang="en-US" dirty="0"/>
           </a:p>
         </p:txBody>
       </p:sp>
@@ -1444,7 +1207,6 @@
               <a:rPr lang="en-US" dirty="0"/>
               <a:t>El modelo de Kuhn se resume en cinco etapas. En la ciencia normal, la comunidad trabaja dentro de un paradigma. Con el tiempo se acumulan anomalías, problemas que el paradigma no explica. Cuando se reconocen, empieza una crisis. La crisis puede terminar en una revolución, donde un paradigma nuevo sustituye al anterior, y el ciclo vuelve a empezar.</a:t>
             </a:r>
-            <a:endParaRPr lang="en-US" dirty="0"/>
           </a:p>
         </p:txBody>
       </p:sp>
@@ -1532,7 +1294,6 @@
               <a:rPr lang="en-US" dirty="0"/>
               <a:t>Cuatro ideas bastan para usar la teoría. El paradigma es el marco de creencias que comparte una comunidad. La ciencia normal es el trabajo de desarrollar ese paradigma. Las anomalías son los problemas que no encajan. Y la inconmensurabilidad dice que un paradigma nuevo no es una versión mejorada del anterior, sino otra forma de ver el problema.</a:t>
             </a:r>
-            <a:endParaRPr lang="en-US" dirty="0"/>
           </a:p>
         </p:txBody>
       </p:sp>
@@ -1620,7 +1381,6 @@
               <a:rPr lang="en-US" dirty="0"/>
               <a:t>Una lectura crítica reconoce el aporte y los límites. El aporte: Kuhn da valor al contexto histórico y social de la ciencia. El límite: su concepto de paradigma es impreciso, y él mismo tuvo que revisarlo. Frente a Lakatos, que parte de una norma previa, Kuhn describe lo que la comunidad científica realmente hace. Y una cautela importante: Kuhn habló de ciencias naturales, así que aplicarlo a la seguridad informática es una analogía útil, no una prueba.</a:t>
             </a:r>
-            <a:endParaRPr lang="en-US" dirty="0"/>
           </a:p>
         </p:txBody>
       </p:sp>
@@ -1708,7 +1468,6 @@
               <a:rPr lang="en-US" dirty="0"/>
               <a:t>Aquí aplico la teoría. El paradigma vigente fue la seguridad perimetral y revisar la seguridad al final. Las anomalías aparecen cuando la explotación de vulnerabilidades pasa a ser la vía de entrada más frecuente. La crisis se ve en la deuda de seguridad y el costo de las brechas. El nuevo paradigma es Zero Trust y el desarrollo seguro desde el diseño. Y la inconmensurabilidad sugiere por qué cuesta cambiar: seguridad y desarrollo hablan lenguajes distintos. Esto último es una hipótesis que el estudio debe contrastar.</a:t>
             </a:r>
-            <a:endParaRPr lang="en-US" dirty="0"/>
           </a:p>
         </p:txBody>
       </p:sp>
@@ -1796,7 +1555,6 @@
               <a:rPr lang="en-US" dirty="0"/>
               <a:t>Estas tres cifras muestran la crisis. Según Verizon 2026, el 31 % de las brechas empieza explotando una vulnerabilidad, y por primera vez supera al robo de credenciales. Según Veracode, el 82 % de las organizaciones acumula deuda de seguridad. Y según IBM, una brecha cuesta en promedio casi cinco millones de dólares.</a:t>
             </a:r>
-            <a:endParaRPr lang="en-US" dirty="0"/>
           </a:p>
         </p:txBody>
       </p:sp>
@@ -1884,7 +1642,6 @@
               <a:rPr lang="en-US" dirty="0"/>
               <a:t>Para delimitar el problema uso la técnica del embudo. En el nivel macro, el panorama mundial que acabo de mostrar. En el nivel meso, Guatemala: los ciberataques aumentaron 200 % en 2024 y la ley de ciberseguridad sigue en discusión. En el nivel micro, los equipos de desarrollo de empresas medianas del área metropolitana, donde no encontré datos publicados.</a:t>
             </a:r>
-            <a:endParaRPr lang="en-US" dirty="0"/>
           </a:p>
         </p:txBody>
       </p:sp>
@@ -1962,6 +1719,7 @@
         <a:solidFill>
           <a:srgbClr val="FFFFFF"/>
         </a:solidFill>
+        <a:effectLst/>
       </p:bgPr>
     </p:bg>
     <p:spTree>
@@ -1999,7 +1757,7 @@
           <a:bodyPr wrap="square" lIns="0" tIns="0" rIns="0" bIns="0" rtlCol="0" anchor="ctr"/>
           <a:lstStyle/>
           <a:p>
-            <a:pPr indent="0" marL="0">
+            <a:pPr marL="0" indent="0">
               <a:buNone/>
             </a:pPr>
             <a:r>
@@ -2034,7 +1792,7 @@
           </a:prstGeom>
           <a:extLst>
             <a:ext uri="{C572A759-6A51-4108-AA02-DFA0A04FC94B}">
-              <ma14:wrappingTextBoxFlag xmlns:ma14="http://schemas.microsoft.com/office/mac/drawingml/2011/main" val="0"/>
+              <ma14:wrappingTextBoxFlag xmlns:ma14="http://schemas.microsoft.com/office/mac/drawingml/2011/main" xmlns="" val="0"/>
             </a:ext>
           </a:extLst>
         </p:spPr>
@@ -2052,8 +1810,8 @@
           <a:p>
             <a:pPr algn="r"/>
             <a:fld id="{F7021451-1387-4CA6-816F-3879F97B5CBC}" type="slidenum">
-              <a:rPr b="0" lang="en-US"/>
-              <a:t>1002</a:t>
+              <a:rPr lang="en-US" b="0"/>
+              <a:t>‹Nº›</a:t>
             </a:fld>
             <a:endParaRPr lang="en-US"/>
           </a:p>
@@ -2075,6 +1833,7 @@
         <a:solidFill>
           <a:srgbClr val="1B2A41"/>
         </a:solidFill>
+        <a:effectLst/>
       </p:bgPr>
     </p:bg>
     <p:spTree>
@@ -2102,6 +1861,11 @@
 <file path=ppt/slideMasters/slideMaster1.xml><?xml version="1.0" encoding="utf-8"?>
 <p:sldMaster xmlns:a="http://schemas.openxmlformats.org/drawingml/2006/main" xmlns:r="http://schemas.openxmlformats.org/officeDocument/2006/relationships" xmlns:p="http://schemas.openxmlformats.org/presentationml/2006/main">
   <p:cSld>
+    <p:bg>
+      <p:bgRef idx="1001">
+        <a:schemeClr val="bg1"/>
+      </p:bgRef>
+    </p:bg>
     <p:spTree>
       <p:nvGrpSpPr>
         <p:cNvPr id="1" name=""/>
@@ -2136,7 +1900,7 @@
           </a:prstGeom>
           <a:extLst>
             <a:ext uri="{C572A759-6A51-4108-AA02-DFA0A04FC94B}">
-              <ma14:wrappingTextBoxFlag xmlns:ma14="http://schemas.microsoft.com/office/mac/drawingml/2011/main" val="0"/>
+              <ma14:wrappingTextBoxFlag xmlns:ma14="http://schemas.microsoft.com/office/mac/drawingml/2011/main" xmlns="" val="0"/>
             </a:ext>
           </a:extLst>
         </p:spPr>
@@ -2154,8 +1918,8 @@
           <a:p>
             <a:pPr algn="r"/>
             <a:fld id="{F7021451-1387-4CA6-816F-3879F97B5CBC}" type="slidenum">
-              <a:rPr b="0" lang="en-US"/>
-              <a:t>null</a:t>
+              <a:rPr lang="en-US" b="0"/>
+              <a:t>‹Nº›</a:t>
             </a:fld>
             <a:endParaRPr lang="en-US"/>
           </a:p>
@@ -2461,11 +2225,11 @@
           <a:bodyPr wrap="square" lIns="0" tIns="0" rIns="0" bIns="0" rtlCol="0" anchor="t"/>
           <a:lstStyle/>
           <a:p>
-            <a:pPr indent="0" marL="0">
-              <a:buNone/>
-            </a:pPr>
-            <a:r>
-              <a:rPr lang="en-US" sz="1400" b="1" spc="300" kern="0" dirty="0">
+            <a:pPr marL="0" indent="0">
+              <a:buNone/>
+            </a:pPr>
+            <a:r>
+              <a:rPr lang="en-US" sz="1400" b="1" kern="0" spc="300" dirty="0">
                 <a:solidFill>
                   <a:schemeClr val="accent3"/>
                 </a:solidFill>
@@ -2500,14 +2264,13 @@
           <a:bodyPr wrap="square" rtlCol="0"/>
           <a:lstStyle/>
           <a:p>
-            <a:pPr indent="0" marL="0">
+            <a:pPr marL="0" indent="0">
               <a:buNone/>
             </a:pPr>
             <a:r>
               <a:rPr lang="en-US" dirty="0"/>
               <a:t>La teoría de los paradigmas de Thomas Kuhn</a:t>
             </a:r>
-            <a:endParaRPr lang="en-US" dirty="0"/>
           </a:p>
         </p:txBody>
       </p:sp>
@@ -2519,7 +2282,7 @@
         </p:nvSpPr>
         <p:spPr>
           <a:xfrm>
-            <a:off x="731520" y="3246120"/>
+            <a:off x="731520" y="1371600"/>
             <a:ext cx="10515600" cy="548640"/>
           </a:xfrm>
           <a:prstGeom prst="rect">
@@ -2532,11 +2295,11 @@
           <a:bodyPr wrap="square" lIns="0" tIns="0" rIns="0" bIns="0" rtlCol="0" anchor="t"/>
           <a:lstStyle/>
           <a:p>
-            <a:pPr indent="0" marL="0">
-              <a:buNone/>
-            </a:pPr>
-            <a:r>
-              <a:rPr lang="en-US" sz="2400" i="1" dirty="0">
+            <a:pPr marL="0" indent="0">
+              <a:buNone/>
+            </a:pPr>
+            <a:r>
+              <a:rPr lang="en-US" sz="7200" i="1" dirty="0">
                 <a:solidFill>
                   <a:schemeClr val="accent6"/>
                 </a:solidFill>
@@ -2546,7 +2309,7 @@
               </a:rPr>
               <a:t>Una lectura crítica aplicada a la seguridad informática</a:t>
             </a:r>
-            <a:endParaRPr lang="en-US" sz="2400" dirty="0"/>
+            <a:endParaRPr lang="en-US" sz="7200" dirty="0"/>
           </a:p>
         </p:txBody>
       </p:sp>
@@ -2571,7 +2334,7 @@
           <a:bodyPr wrap="square" lIns="0" tIns="0" rIns="0" bIns="0" rtlCol="0" anchor="t"/>
           <a:lstStyle/>
           <a:p>
-            <a:pPr indent="0" marL="0">
+            <a:pPr marL="0" indent="0">
               <a:spcAft>
                 <a:spcPts val="400"/>
               </a:spcAft>
@@ -2591,7 +2354,7 @@
             <a:endParaRPr lang="en-US" sz="1600" dirty="0"/>
           </a:p>
           <a:p>
-            <a:pPr indent="0" marL="0">
+            <a:pPr marL="0" indent="0">
               <a:spcAft>
                 <a:spcPts val="400"/>
               </a:spcAft>
@@ -2611,7 +2374,7 @@
             <a:endParaRPr lang="en-US" sz="1600" dirty="0"/>
           </a:p>
           <a:p>
-            <a:pPr indent="0" marL="0">
+            <a:pPr marL="0" indent="0">
               <a:spcAft>
                 <a:spcPts val="400"/>
               </a:spcAft>
@@ -2678,14 +2441,13 @@
           <a:bodyPr wrap="square" rtlCol="0"/>
           <a:lstStyle/>
           <a:p>
-            <a:pPr indent="0" marL="0">
+            <a:pPr marL="0" indent="0">
               <a:buNone/>
             </a:pPr>
             <a:r>
               <a:rPr lang="en-US" dirty="0"/>
               <a:t>Planteamiento del problema</a:t>
             </a:r>
-            <a:endParaRPr lang="en-US" dirty="0"/>
           </a:p>
         </p:txBody>
       </p:sp>
@@ -2737,11 +2499,11 @@
           <a:bodyPr wrap="square" lIns="0" tIns="0" rIns="0" bIns="0" rtlCol="0" anchor="t"/>
           <a:lstStyle/>
           <a:p>
-            <a:pPr indent="0" marL="0">
-              <a:buNone/>
-            </a:pPr>
-            <a:r>
-              <a:rPr lang="en-US" sz="1300" b="1" spc="200" kern="0" dirty="0">
+            <a:pPr marL="0" indent="0">
+              <a:buNone/>
+            </a:pPr>
+            <a:r>
+              <a:rPr lang="en-US" sz="1300" b="1" kern="0" spc="200" dirty="0">
                 <a:solidFill>
                   <a:schemeClr val="bg1"/>
                 </a:solidFill>
@@ -2776,7 +2538,7 @@
           <a:bodyPr wrap="square" lIns="0" tIns="0" rIns="0" bIns="0" rtlCol="0" anchor="t"/>
           <a:lstStyle/>
           <a:p>
-            <a:pPr indent="0" marL="0">
+            <a:pPr marL="0" indent="0">
               <a:buNone/>
             </a:pPr>
             <a:r>
@@ -2815,7 +2577,7 @@
           <a:bodyPr wrap="square" lIns="0" tIns="0" rIns="0" bIns="0" rtlCol="0" anchor="t"/>
           <a:lstStyle/>
           <a:p>
-            <a:pPr indent="0" marL="0">
+            <a:pPr marL="0" indent="0">
               <a:buNone/>
             </a:pPr>
             <a:r>
@@ -2854,11 +2616,11 @@
           <a:bodyPr wrap="square" lIns="0" tIns="0" rIns="0" bIns="0" rtlCol="0" anchor="t"/>
           <a:lstStyle/>
           <a:p>
-            <a:pPr indent="0" marL="0">
-              <a:buNone/>
-            </a:pPr>
-            <a:r>
-              <a:rPr lang="en-US" sz="1300" b="1" spc="200" kern="0" dirty="0">
+            <a:pPr marL="0" indent="0">
+              <a:buNone/>
+            </a:pPr>
+            <a:r>
+              <a:rPr lang="en-US" sz="1300" b="1" kern="0" spc="200" dirty="0">
                 <a:solidFill>
                   <a:schemeClr val="accent4"/>
                 </a:solidFill>
@@ -2920,7 +2682,7 @@
           <a:bodyPr wrap="square" lIns="0" tIns="0" rIns="0" bIns="0" rtlCol="0" anchor="t"/>
           <a:lstStyle/>
           <a:p>
-            <a:pPr indent="0" marL="0">
+            <a:pPr marL="0" indent="0">
               <a:buNone/>
             </a:pPr>
             <a:r>
@@ -2959,7 +2721,7 @@
           <a:bodyPr wrap="square" lIns="0" tIns="0" rIns="0" bIns="0" rtlCol="0" anchor="t"/>
           <a:lstStyle/>
           <a:p>
-            <a:pPr indent="0" marL="0">
+            <a:pPr marL="0" indent="0">
               <a:buNone/>
             </a:pPr>
             <a:r>
@@ -3025,7 +2787,7 @@
           <a:bodyPr wrap="square" lIns="0" tIns="0" rIns="0" bIns="0" rtlCol="0" anchor="t"/>
           <a:lstStyle/>
           <a:p>
-            <a:pPr indent="0" marL="0">
+            <a:pPr marL="0" indent="0">
               <a:buNone/>
             </a:pPr>
             <a:r>
@@ -3064,7 +2826,7 @@
           <a:bodyPr wrap="square" lIns="0" tIns="0" rIns="0" bIns="0" rtlCol="0" anchor="t"/>
           <a:lstStyle/>
           <a:p>
-            <a:pPr indent="0" marL="0">
+            <a:pPr marL="0" indent="0">
               <a:buNone/>
             </a:pPr>
             <a:r>
@@ -3130,7 +2892,7 @@
           <a:bodyPr wrap="square" lIns="0" tIns="0" rIns="0" bIns="0" rtlCol="0" anchor="t"/>
           <a:lstStyle/>
           <a:p>
-            <a:pPr indent="0" marL="0">
+            <a:pPr marL="0" indent="0">
               <a:buNone/>
             </a:pPr>
             <a:r>
@@ -3169,7 +2931,7 @@
           <a:bodyPr wrap="square" lIns="0" tIns="0" rIns="0" bIns="0" rtlCol="0" anchor="t"/>
           <a:lstStyle/>
           <a:p>
-            <a:pPr indent="0" marL="0">
+            <a:pPr marL="0" indent="0">
               <a:buNone/>
             </a:pPr>
             <a:r>
@@ -3207,7 +2969,7 @@
           </a:prstGeom>
           <a:extLst>
             <a:ext uri="{C572A759-6A51-4108-AA02-DFA0A04FC94B}">
-              <ma14:wrappingTextBoxFlag xmlns:ma14="http://schemas.microsoft.com/office/mac/drawingml/2011/main" val="0"/>
+              <ma14:wrappingTextBoxFlag xmlns:ma14="http://schemas.microsoft.com/office/mac/drawingml/2011/main" xmlns="" val="0"/>
             </a:ext>
           </a:extLst>
         </p:spPr>
@@ -3225,7 +2987,7 @@
           <a:p>
             <a:pPr algn="r"/>
             <a:fld id="{F7021451-1387-4CA6-816F-3879F97B5CBC}" type="slidenum">
-              <a:rPr b="0" lang="en-US"/>
+              <a:rPr lang="en-US" b="0"/>
               <a:t>10</a:t>
             </a:fld>
             <a:endParaRPr lang="en-US"/>
@@ -3278,27 +3040,26 @@
           <a:bodyPr wrap="square" rtlCol="0"/>
           <a:lstStyle/>
           <a:p>
-            <a:pPr indent="0" marL="0">
+            <a:pPr marL="0" indent="0">
               <a:buNone/>
             </a:pPr>
             <a:r>
               <a:rPr lang="en-US" dirty="0"/>
               <a:t>Árbol de problemas</a:t>
             </a:r>
-            <a:endParaRPr lang="en-US" dirty="0"/>
           </a:p>
         </p:txBody>
       </p:sp>
       <p:pic>
         <p:nvPicPr>
-          <p:cNvPr id="3" name="Image 0" descr="Árbol de problemas: cinco causas, problema central y cuatro efectos">    </p:cNvPr>
+          <p:cNvPr id="3" name="Image 0" descr="Árbol de problemas: cinco causas, problema central y cuatro efectos"/>
           <p:cNvPicPr>
             <a:picLocks noChangeAspect="1"/>
           </p:cNvPicPr>
           <p:nvPr/>
         </p:nvPicPr>
         <p:blipFill>
-          <a:blip r:embed="rId1"/>
+          <a:blip r:embed="rId3"/>
           <a:stretch>
             <a:fillRect/>
           </a:stretch>
@@ -3334,7 +3095,7 @@
           <a:bodyPr wrap="square" lIns="0" tIns="0" rIns="0" bIns="0" rtlCol="0" anchor="t"/>
           <a:lstStyle/>
           <a:p>
-            <a:pPr indent="0" marL="0">
+            <a:pPr marL="0" indent="0">
               <a:buNone/>
             </a:pPr>
             <a:r>
@@ -3372,7 +3133,7 @@
           </a:prstGeom>
           <a:extLst>
             <a:ext uri="{C572A759-6A51-4108-AA02-DFA0A04FC94B}">
-              <ma14:wrappingTextBoxFlag xmlns:ma14="http://schemas.microsoft.com/office/mac/drawingml/2011/main" val="0"/>
+              <ma14:wrappingTextBoxFlag xmlns:ma14="http://schemas.microsoft.com/office/mac/drawingml/2011/main" xmlns="" val="0"/>
             </a:ext>
           </a:extLst>
         </p:spPr>
@@ -3390,7 +3151,7 @@
           <a:p>
             <a:pPr algn="r"/>
             <a:fld id="{F7021451-1387-4CA6-816F-3879F97B5CBC}" type="slidenum">
-              <a:rPr b="0" lang="en-US"/>
+              <a:rPr lang="en-US" b="0"/>
               <a:t>11</a:t>
             </a:fld>
             <a:endParaRPr lang="en-US"/>
@@ -3443,27 +3204,26 @@
           <a:bodyPr wrap="square" rtlCol="0"/>
           <a:lstStyle/>
           <a:p>
-            <a:pPr indent="0" marL="0">
+            <a:pPr marL="0" indent="0">
               <a:buNone/>
             </a:pPr>
             <a:r>
               <a:rPr lang="en-US" dirty="0"/>
               <a:t>Árbol de objetivos</a:t>
             </a:r>
-            <a:endParaRPr lang="en-US" dirty="0"/>
           </a:p>
         </p:txBody>
       </p:sp>
       <p:pic>
         <p:nvPicPr>
-          <p:cNvPr id="3" name="Image 0" descr="Árbol de objetivos: cinco medios, objetivo central y cuatro fines">    </p:cNvPr>
+          <p:cNvPr id="3" name="Image 0" descr="Árbol de objetivos: cinco medios, objetivo central y cuatro fines"/>
           <p:cNvPicPr>
             <a:picLocks noChangeAspect="1"/>
           </p:cNvPicPr>
           <p:nvPr/>
         </p:nvPicPr>
         <p:blipFill>
-          <a:blip r:embed="rId1"/>
+          <a:blip r:embed="rId3"/>
           <a:stretch>
             <a:fillRect/>
           </a:stretch>
@@ -3499,7 +3259,7 @@
           <a:bodyPr wrap="square" lIns="0" tIns="0" rIns="0" bIns="0" rtlCol="0" anchor="t"/>
           <a:lstStyle/>
           <a:p>
-            <a:pPr indent="0" marL="0">
+            <a:pPr marL="0" indent="0">
               <a:buNone/>
             </a:pPr>
             <a:r>
@@ -3537,7 +3297,7 @@
           </a:prstGeom>
           <a:extLst>
             <a:ext uri="{C572A759-6A51-4108-AA02-DFA0A04FC94B}">
-              <ma14:wrappingTextBoxFlag xmlns:ma14="http://schemas.microsoft.com/office/mac/drawingml/2011/main" val="0"/>
+              <ma14:wrappingTextBoxFlag xmlns:ma14="http://schemas.microsoft.com/office/mac/drawingml/2011/main" xmlns="" val="0"/>
             </a:ext>
           </a:extLst>
         </p:spPr>
@@ -3555,7 +3315,7 @@
           <a:p>
             <a:pPr algn="r"/>
             <a:fld id="{F7021451-1387-4CA6-816F-3879F97B5CBC}" type="slidenum">
-              <a:rPr b="0" lang="en-US"/>
+              <a:rPr lang="en-US" b="0"/>
               <a:t>12</a:t>
             </a:fld>
             <a:endParaRPr lang="en-US"/>
@@ -3608,14 +3368,13 @@
           <a:bodyPr wrap="square" rtlCol="0"/>
           <a:lstStyle/>
           <a:p>
-            <a:pPr indent="0" marL="0">
+            <a:pPr marL="0" indent="0">
               <a:buNone/>
             </a:pPr>
             <a:r>
               <a:rPr lang="en-US" dirty="0"/>
               <a:t>Pregunta y objetivos de investigación</a:t>
             </a:r>
-            <a:endParaRPr lang="en-US" dirty="0"/>
           </a:p>
         </p:txBody>
       </p:sp>
@@ -3647,7 +3406,10 @@
         </p:spPr>
         <p:txBody>
           <a:bodyPr/>
-          <a:p/>
+          <a:lstStyle/>
+          <a:p>
+            <a:endParaRPr/>
+          </a:p>
         </p:txBody>
       </p:sp>
       <p:sp>
@@ -3671,11 +3433,11 @@
           <a:bodyPr wrap="square" lIns="0" tIns="0" rIns="0" bIns="0" rtlCol="0" anchor="t"/>
           <a:lstStyle/>
           <a:p>
-            <a:pPr indent="0" marL="0">
-              <a:buNone/>
-            </a:pPr>
-            <a:r>
-              <a:rPr lang="en-US" sz="1200" b="1" spc="200" kern="0" dirty="0">
+            <a:pPr marL="0" indent="0">
+              <a:buNone/>
+            </a:pPr>
+            <a:r>
+              <a:rPr lang="en-US" sz="1200" b="1" kern="0" spc="200" dirty="0">
                 <a:solidFill>
                   <a:schemeClr val="accent3"/>
                 </a:solidFill>
@@ -3710,7 +3472,7 @@
           <a:bodyPr wrap="square" lIns="0" tIns="0" rIns="0" bIns="0" rtlCol="0" anchor="t"/>
           <a:lstStyle/>
           <a:p>
-            <a:pPr indent="0" marL="0">
+            <a:pPr marL="0" indent="0">
               <a:buNone/>
             </a:pPr>
             <a:r>
@@ -3756,7 +3518,10 @@
         </p:spPr>
         <p:txBody>
           <a:bodyPr/>
-          <a:p/>
+          <a:lstStyle/>
+          <a:p>
+            <a:endParaRPr/>
+          </a:p>
         </p:txBody>
       </p:sp>
       <p:sp>
@@ -3780,11 +3545,11 @@
           <a:bodyPr wrap="square" lIns="0" tIns="0" rIns="0" bIns="0" rtlCol="0" anchor="t"/>
           <a:lstStyle/>
           <a:p>
-            <a:pPr indent="0" marL="0">
-              <a:buNone/>
-            </a:pPr>
-            <a:r>
-              <a:rPr lang="en-US" sz="1200" b="1" spc="200" kern="0" dirty="0">
+            <a:pPr marL="0" indent="0">
+              <a:buNone/>
+            </a:pPr>
+            <a:r>
+              <a:rPr lang="en-US" sz="1200" b="1" kern="0" spc="200" dirty="0">
                 <a:solidFill>
                   <a:schemeClr val="accent1"/>
                 </a:solidFill>
@@ -3819,7 +3584,7 @@
           <a:bodyPr wrap="square" lIns="0" tIns="0" rIns="0" bIns="0" rtlCol="0" anchor="t"/>
           <a:lstStyle/>
           <a:p>
-            <a:pPr indent="0" marL="0">
+            <a:pPr marL="0" indent="0">
               <a:buNone/>
             </a:pPr>
             <a:r>
@@ -3865,7 +3630,10 @@
         </p:spPr>
         <p:txBody>
           <a:bodyPr/>
-          <a:p/>
+          <a:lstStyle/>
+          <a:p>
+            <a:endParaRPr/>
+          </a:p>
         </p:txBody>
       </p:sp>
       <p:sp>
@@ -3889,11 +3657,11 @@
           <a:bodyPr wrap="square" lIns="0" tIns="0" rIns="0" bIns="0" rtlCol="0" anchor="t"/>
           <a:lstStyle/>
           <a:p>
-            <a:pPr indent="0" marL="0">
-              <a:buNone/>
-            </a:pPr>
-            <a:r>
-              <a:rPr lang="en-US" sz="1200" b="1" spc="200" kern="0" dirty="0">
+            <a:pPr marL="0" indent="0">
+              <a:buNone/>
+            </a:pPr>
+            <a:r>
+              <a:rPr lang="en-US" sz="1200" b="1" kern="0" spc="200" dirty="0">
                 <a:solidFill>
                   <a:schemeClr val="accent1"/>
                 </a:solidFill>
@@ -3933,7 +3701,10 @@
         </p:spPr>
         <p:txBody>
           <a:bodyPr/>
-          <a:p/>
+          <a:lstStyle/>
+          <a:p>
+            <a:endParaRPr/>
+          </a:p>
         </p:txBody>
       </p:sp>
       <p:sp>
@@ -3957,7 +3728,7 @@
           <a:bodyPr wrap="square" lIns="0" tIns="0" rIns="0" bIns="0" rtlCol="0" anchor="ctr"/>
           <a:lstStyle/>
           <a:p>
-            <a:pPr algn="ctr" indent="0" marL="0">
+            <a:pPr marL="0" indent="0" algn="ctr">
               <a:buNone/>
             </a:pPr>
             <a:r>
@@ -3996,7 +3767,7 @@
           <a:bodyPr wrap="square" lIns="0" tIns="0" rIns="0" bIns="0" rtlCol="0" anchor="t"/>
           <a:lstStyle/>
           <a:p>
-            <a:pPr indent="0" marL="0">
+            <a:pPr marL="0" indent="0">
               <a:buNone/>
             </a:pPr>
             <a:r>
@@ -4040,7 +3811,10 @@
         </p:spPr>
         <p:txBody>
           <a:bodyPr/>
-          <a:p/>
+          <a:lstStyle/>
+          <a:p>
+            <a:endParaRPr/>
+          </a:p>
         </p:txBody>
       </p:sp>
       <p:sp>
@@ -4064,7 +3838,7 @@
           <a:bodyPr wrap="square" lIns="0" tIns="0" rIns="0" bIns="0" rtlCol="0" anchor="ctr"/>
           <a:lstStyle/>
           <a:p>
-            <a:pPr algn="ctr" indent="0" marL="0">
+            <a:pPr marL="0" indent="0" algn="ctr">
               <a:buNone/>
             </a:pPr>
             <a:r>
@@ -4103,7 +3877,7 @@
           <a:bodyPr wrap="square" lIns="0" tIns="0" rIns="0" bIns="0" rtlCol="0" anchor="t"/>
           <a:lstStyle/>
           <a:p>
-            <a:pPr indent="0" marL="0">
+            <a:pPr marL="0" indent="0">
               <a:buNone/>
             </a:pPr>
             <a:r>
@@ -4147,7 +3921,10 @@
         </p:spPr>
         <p:txBody>
           <a:bodyPr/>
-          <a:p/>
+          <a:lstStyle/>
+          <a:p>
+            <a:endParaRPr/>
+          </a:p>
         </p:txBody>
       </p:sp>
       <p:sp>
@@ -4171,7 +3948,7 @@
           <a:bodyPr wrap="square" lIns="0" tIns="0" rIns="0" bIns="0" rtlCol="0" anchor="ctr"/>
           <a:lstStyle/>
           <a:p>
-            <a:pPr algn="ctr" indent="0" marL="0">
+            <a:pPr marL="0" indent="0" algn="ctr">
               <a:buNone/>
             </a:pPr>
             <a:r>
@@ -4210,7 +3987,7 @@
           <a:bodyPr wrap="square" lIns="0" tIns="0" rIns="0" bIns="0" rtlCol="0" anchor="t"/>
           <a:lstStyle/>
           <a:p>
-            <a:pPr indent="0" marL="0">
+            <a:pPr marL="0" indent="0">
               <a:buNone/>
             </a:pPr>
             <a:r>
@@ -4248,7 +4025,7 @@
           </a:prstGeom>
           <a:extLst>
             <a:ext uri="{C572A759-6A51-4108-AA02-DFA0A04FC94B}">
-              <ma14:wrappingTextBoxFlag xmlns:ma14="http://schemas.microsoft.com/office/mac/drawingml/2011/main" val="0"/>
+              <ma14:wrappingTextBoxFlag xmlns:ma14="http://schemas.microsoft.com/office/mac/drawingml/2011/main" xmlns="" val="0"/>
             </a:ext>
           </a:extLst>
         </p:spPr>
@@ -4266,7 +4043,7 @@
           <a:p>
             <a:pPr algn="r"/>
             <a:fld id="{F7021451-1387-4CA6-816F-3879F97B5CBC}" type="slidenum">
-              <a:rPr b="0" lang="en-US"/>
+              <a:rPr lang="en-US" b="0"/>
               <a:t>13</a:t>
             </a:fld>
             <a:endParaRPr lang="en-US"/>
@@ -4319,14 +4096,13 @@
           <a:bodyPr wrap="square" rtlCol="0"/>
           <a:lstStyle/>
           <a:p>
-            <a:pPr indent="0" marL="0">
+            <a:pPr marL="0" indent="0">
               <a:buNone/>
             </a:pPr>
             <a:r>
               <a:rPr lang="en-US" dirty="0"/>
               <a:t>Justificación y viabilidad</a:t>
             </a:r>
-            <a:endParaRPr lang="en-US" dirty="0"/>
           </a:p>
         </p:txBody>
       </p:sp>
@@ -4405,7 +4181,7 @@
           <a:bodyPr wrap="square" lIns="0" tIns="0" rIns="0" bIns="0" rtlCol="0" anchor="ctr"/>
           <a:lstStyle/>
           <a:p>
-            <a:pPr algn="ctr" indent="0" marL="0">
+            <a:pPr marL="0" indent="0" algn="ctr">
               <a:buNone/>
             </a:pPr>
             <a:r>
@@ -4562,7 +4338,7 @@
           <a:bodyPr wrap="square" lIns="0" tIns="0" rIns="0" bIns="0" rtlCol="0" anchor="ctr"/>
           <a:lstStyle/>
           <a:p>
-            <a:pPr algn="ctr" indent="0" marL="0">
+            <a:pPr marL="0" indent="0" algn="ctr">
               <a:buNone/>
             </a:pPr>
             <a:r>
@@ -4719,7 +4495,7 @@
           <a:bodyPr wrap="square" lIns="0" tIns="0" rIns="0" bIns="0" rtlCol="0" anchor="ctr"/>
           <a:lstStyle/>
           <a:p>
-            <a:pPr algn="ctr" indent="0" marL="0">
+            <a:pPr marL="0" indent="0" algn="ctr">
               <a:buNone/>
             </a:pPr>
             <a:r>
@@ -4849,7 +4625,7 @@
           <a:bodyPr wrap="square" lIns="0" tIns="0" rIns="0" bIns="0" rtlCol="0" anchor="ctr"/>
           <a:lstStyle/>
           <a:p>
-            <a:pPr indent="0" marL="0">
+            <a:pPr marL="0" indent="0">
               <a:buNone/>
             </a:pPr>
             <a:r>
@@ -4863,9 +4639,6 @@
               </a:rPr>
               <a:t>Viabilidad: </a:t>
             </a:r>
-            <a:pPr indent="0" marL="0">
-              <a:buNone/>
-            </a:pPr>
             <a:r>
               <a:rPr lang="en-US" sz="1700" dirty="0">
                 <a:solidFill>
@@ -4901,7 +4674,7 @@
           </a:prstGeom>
           <a:extLst>
             <a:ext uri="{C572A759-6A51-4108-AA02-DFA0A04FC94B}">
-              <ma14:wrappingTextBoxFlag xmlns:ma14="http://schemas.microsoft.com/office/mac/drawingml/2011/main" val="0"/>
+              <ma14:wrappingTextBoxFlag xmlns:ma14="http://schemas.microsoft.com/office/mac/drawingml/2011/main" xmlns="" val="0"/>
             </a:ext>
           </a:extLst>
         </p:spPr>
@@ -4919,7 +4692,7 @@
           <a:p>
             <a:pPr algn="r"/>
             <a:fld id="{F7021451-1387-4CA6-816F-3879F97B5CBC}" type="slidenum">
-              <a:rPr b="0" lang="en-US"/>
+              <a:rPr lang="en-US" b="0"/>
               <a:t>14</a:t>
             </a:fld>
             <a:endParaRPr lang="en-US"/>
@@ -4959,7 +4732,7 @@
         </p:nvSpPr>
         <p:spPr>
           <a:xfrm>
-            <a:off x="0" y="822960"/>
+            <a:off x="1005840" y="749137"/>
             <a:ext cx="9144000" cy="2377440"/>
           </a:xfrm>
           <a:prstGeom prst="rect">
@@ -4972,14 +4745,18 @@
           <a:bodyPr wrap="square" rtlCol="0"/>
           <a:lstStyle/>
           <a:p>
-            <a:pPr indent="0" marL="0">
-              <a:buNone/>
-            </a:pPr>
-            <a:r>
-              <a:rPr lang="en-US" sz="3800" dirty="0"/>
+            <a:pPr marL="0" indent="0">
+              <a:buNone/>
+            </a:pPr>
+            <a:r>
+              <a:rPr lang="en-US" sz="4800" dirty="0">
+                <a:solidFill>
+                  <a:schemeClr val="bg1"/>
+                </a:solidFill>
+                <a:latin typeface="+mj-lt"/>
+              </a:rPr>
               <a:t>Cambiar de paradigma es un reto de personas y organizaciones, no solo de herramientas</a:t>
             </a:r>
-            <a:endParaRPr lang="en-US" sz="3800" dirty="0"/>
           </a:p>
         </p:txBody>
       </p:sp>
@@ -5031,7 +4808,7 @@
           <a:bodyPr wrap="square" lIns="0" tIns="0" rIns="0" bIns="0" rtlCol="0" anchor="t"/>
           <a:lstStyle/>
           <a:p>
-            <a:pPr indent="0" marL="0">
+            <a:pPr marL="0" indent="0">
               <a:buNone/>
             </a:pPr>
             <a:r>
@@ -5070,7 +4847,7 @@
           <a:bodyPr wrap="square" lIns="0" tIns="0" rIns="0" bIns="0" rtlCol="0" anchor="t"/>
           <a:lstStyle/>
           <a:p>
-            <a:pPr indent="0" marL="0">
+            <a:pPr marL="0" indent="0">
               <a:buNone/>
             </a:pPr>
             <a:r>
@@ -5136,7 +4913,7 @@
           <a:bodyPr wrap="square" lIns="0" tIns="0" rIns="0" bIns="0" rtlCol="0" anchor="t"/>
           <a:lstStyle/>
           <a:p>
-            <a:pPr indent="0" marL="0">
+            <a:pPr marL="0" indent="0">
               <a:buNone/>
             </a:pPr>
             <a:r>
@@ -5175,7 +4952,7 @@
           <a:bodyPr wrap="square" lIns="0" tIns="0" rIns="0" bIns="0" rtlCol="0" anchor="t"/>
           <a:lstStyle/>
           <a:p>
-            <a:pPr indent="0" marL="0">
+            <a:pPr marL="0" indent="0">
               <a:buNone/>
             </a:pPr>
             <a:r>
@@ -5241,7 +5018,7 @@
           <a:bodyPr wrap="square" lIns="0" tIns="0" rIns="0" bIns="0" rtlCol="0" anchor="t"/>
           <a:lstStyle/>
           <a:p>
-            <a:pPr indent="0" marL="0">
+            <a:pPr marL="0" indent="0">
               <a:buNone/>
             </a:pPr>
             <a:r>
@@ -5280,7 +5057,7 @@
           <a:bodyPr wrap="square" lIns="0" tIns="0" rIns="0" bIns="0" rtlCol="0" anchor="t"/>
           <a:lstStyle/>
           <a:p>
-            <a:pPr indent="0" marL="0">
+            <a:pPr marL="0" indent="0">
               <a:buNone/>
             </a:pPr>
             <a:r>
@@ -5344,14 +5121,13 @@
           <a:bodyPr wrap="square" rtlCol="0"/>
           <a:lstStyle/>
           <a:p>
-            <a:pPr indent="0" marL="0">
+            <a:pPr marL="0" indent="0">
               <a:buNone/>
             </a:pPr>
             <a:r>
               <a:rPr lang="en-US" dirty="0"/>
               <a:t>Referencias</a:t>
             </a:r>
-            <a:endParaRPr lang="en-US" dirty="0"/>
           </a:p>
         </p:txBody>
       </p:sp>
@@ -5376,7 +5152,7 @@
           <a:bodyPr wrap="square" lIns="0" tIns="0" rIns="0" bIns="0" rtlCol="0" anchor="t"/>
           <a:lstStyle/>
           <a:p>
-            <a:pPr algn="l" indent="0" marL="0">
+            <a:pPr marL="0" indent="0" algn="l">
               <a:spcAft>
                 <a:spcPts val="700"/>
               </a:spcAft>
@@ -5396,7 +5172,7 @@
             <a:endParaRPr lang="en-US" sz="1100" dirty="0"/>
           </a:p>
           <a:p>
-            <a:pPr algn="l" indent="0" marL="0">
+            <a:pPr marL="0" indent="0" algn="l">
               <a:spcAft>
                 <a:spcPts val="700"/>
               </a:spcAft>
@@ -5416,7 +5192,7 @@
             <a:endParaRPr lang="en-US" sz="1100" dirty="0"/>
           </a:p>
           <a:p>
-            <a:pPr algn="l" indent="0" marL="0">
+            <a:pPr marL="0" indent="0" algn="l">
               <a:spcAft>
                 <a:spcPts val="700"/>
               </a:spcAft>
@@ -5436,7 +5212,7 @@
             <a:endParaRPr lang="en-US" sz="1100" dirty="0"/>
           </a:p>
           <a:p>
-            <a:pPr algn="l" indent="0" marL="0">
+            <a:pPr marL="0" indent="0" algn="l">
               <a:spcAft>
                 <a:spcPts val="700"/>
               </a:spcAft>
@@ -5456,7 +5232,7 @@
             <a:endParaRPr lang="en-US" sz="1100" dirty="0"/>
           </a:p>
           <a:p>
-            <a:pPr algn="l" indent="0" marL="0">
+            <a:pPr marL="0" indent="0" algn="l">
               <a:spcAft>
                 <a:spcPts val="700"/>
               </a:spcAft>
@@ -5476,7 +5252,7 @@
             <a:endParaRPr lang="en-US" sz="1100" dirty="0"/>
           </a:p>
           <a:p>
-            <a:pPr algn="l" indent="0" marL="0">
+            <a:pPr marL="0" indent="0" algn="l">
               <a:spcAft>
                 <a:spcPts val="700"/>
               </a:spcAft>
@@ -5518,7 +5294,7 @@
           <a:bodyPr wrap="square" lIns="0" tIns="0" rIns="0" bIns="0" rtlCol="0" anchor="t"/>
           <a:lstStyle/>
           <a:p>
-            <a:pPr algn="l" indent="0" marL="0">
+            <a:pPr marL="0" indent="0" algn="l">
               <a:spcAft>
                 <a:spcPts val="700"/>
               </a:spcAft>
@@ -5538,7 +5314,7 @@
             <a:endParaRPr lang="en-US" sz="1100" dirty="0"/>
           </a:p>
           <a:p>
-            <a:pPr algn="l" indent="0" marL="0">
+            <a:pPr marL="0" indent="0" algn="l">
               <a:spcAft>
                 <a:spcPts val="700"/>
               </a:spcAft>
@@ -5558,7 +5334,7 @@
             <a:endParaRPr lang="en-US" sz="1100" dirty="0"/>
           </a:p>
           <a:p>
-            <a:pPr algn="l" indent="0" marL="0">
+            <a:pPr marL="0" indent="0" algn="l">
               <a:spcAft>
                 <a:spcPts val="700"/>
               </a:spcAft>
@@ -5578,7 +5354,7 @@
             <a:endParaRPr lang="en-US" sz="1100" dirty="0"/>
           </a:p>
           <a:p>
-            <a:pPr algn="l" indent="0" marL="0">
+            <a:pPr marL="0" indent="0" algn="l">
               <a:spcAft>
                 <a:spcPts val="700"/>
               </a:spcAft>
@@ -5598,7 +5374,7 @@
             <a:endParaRPr lang="en-US" sz="1100" dirty="0"/>
           </a:p>
           <a:p>
-            <a:pPr algn="l" indent="0" marL="0">
+            <a:pPr marL="0" indent="0" algn="l">
               <a:spcAft>
                 <a:spcPts val="700"/>
               </a:spcAft>
@@ -5639,7 +5415,7 @@
           </a:prstGeom>
           <a:extLst>
             <a:ext uri="{C572A759-6A51-4108-AA02-DFA0A04FC94B}">
-              <ma14:wrappingTextBoxFlag xmlns:ma14="http://schemas.microsoft.com/office/mac/drawingml/2011/main" val="0"/>
+              <ma14:wrappingTextBoxFlag xmlns:ma14="http://schemas.microsoft.com/office/mac/drawingml/2011/main" xmlns="" val="0"/>
             </a:ext>
           </a:extLst>
         </p:spPr>
@@ -5657,7 +5433,7 @@
           <a:p>
             <a:pPr algn="r"/>
             <a:fld id="{F7021451-1387-4CA6-816F-3879F97B5CBC}" type="slidenum">
-              <a:rPr b="0" lang="en-US"/>
+              <a:rPr lang="en-US" b="0"/>
               <a:t>16</a:t>
             </a:fld>
             <a:endParaRPr lang="en-US"/>
@@ -5710,14 +5486,13 @@
           <a:bodyPr wrap="square" rtlCol="0"/>
           <a:lstStyle/>
           <a:p>
-            <a:pPr indent="0" marL="0">
+            <a:pPr marL="0" indent="0">
               <a:buNone/>
             </a:pPr>
             <a:r>
               <a:rPr lang="en-US" dirty="0"/>
               <a:t>Ruta de la exposición</a:t>
             </a:r>
-            <a:endParaRPr lang="en-US" dirty="0"/>
           </a:p>
         </p:txBody>
       </p:sp>
@@ -5794,7 +5569,7 @@
           <a:bodyPr wrap="square" lIns="0" tIns="0" rIns="0" bIns="0" rtlCol="0" anchor="ctr"/>
           <a:lstStyle/>
           <a:p>
-            <a:pPr algn="ctr" indent="0" marL="0">
+            <a:pPr marL="0" indent="0" algn="ctr">
               <a:buNone/>
             </a:pPr>
             <a:r>
@@ -5833,7 +5608,7 @@
           <a:bodyPr wrap="square" lIns="0" tIns="0" rIns="0" bIns="0" rtlCol="0" anchor="t"/>
           <a:lstStyle/>
           <a:p>
-            <a:pPr indent="0" marL="0">
+            <a:pPr marL="0" indent="0">
               <a:buNone/>
             </a:pPr>
             <a:r>
@@ -5872,7 +5647,7 @@
           <a:bodyPr wrap="square" lIns="0" tIns="0" rIns="0" bIns="0" rtlCol="0" anchor="t"/>
           <a:lstStyle/>
           <a:p>
-            <a:pPr indent="0" marL="0">
+            <a:pPr marL="0" indent="0">
               <a:buNone/>
             </a:pPr>
             <a:r>
@@ -5963,7 +5738,7 @@
           <a:bodyPr wrap="square" lIns="0" tIns="0" rIns="0" bIns="0" rtlCol="0" anchor="ctr"/>
           <a:lstStyle/>
           <a:p>
-            <a:pPr algn="ctr" indent="0" marL="0">
+            <a:pPr marL="0" indent="0" algn="ctr">
               <a:buNone/>
             </a:pPr>
             <a:r>
@@ -6002,7 +5777,7 @@
           <a:bodyPr wrap="square" lIns="0" tIns="0" rIns="0" bIns="0" rtlCol="0" anchor="t"/>
           <a:lstStyle/>
           <a:p>
-            <a:pPr indent="0" marL="0">
+            <a:pPr marL="0" indent="0">
               <a:buNone/>
             </a:pPr>
             <a:r>
@@ -6041,7 +5816,7 @@
           <a:bodyPr wrap="square" lIns="0" tIns="0" rIns="0" bIns="0" rtlCol="0" anchor="t"/>
           <a:lstStyle/>
           <a:p>
-            <a:pPr indent="0" marL="0">
+            <a:pPr marL="0" indent="0">
               <a:buNone/>
             </a:pPr>
             <a:r>
@@ -6132,7 +5907,7 @@
           <a:bodyPr wrap="square" lIns="0" tIns="0" rIns="0" bIns="0" rtlCol="0" anchor="ctr"/>
           <a:lstStyle/>
           <a:p>
-            <a:pPr algn="ctr" indent="0" marL="0">
+            <a:pPr marL="0" indent="0" algn="ctr">
               <a:buNone/>
             </a:pPr>
             <a:r>
@@ -6171,7 +5946,7 @@
           <a:bodyPr wrap="square" lIns="0" tIns="0" rIns="0" bIns="0" rtlCol="0" anchor="t"/>
           <a:lstStyle/>
           <a:p>
-            <a:pPr indent="0" marL="0">
+            <a:pPr marL="0" indent="0">
               <a:buNone/>
             </a:pPr>
             <a:r>
@@ -6210,7 +5985,7 @@
           <a:bodyPr wrap="square" lIns="0" tIns="0" rIns="0" bIns="0" rtlCol="0" anchor="t"/>
           <a:lstStyle/>
           <a:p>
-            <a:pPr indent="0" marL="0">
+            <a:pPr marL="0" indent="0">
               <a:buNone/>
             </a:pPr>
             <a:r>
@@ -6248,7 +6023,7 @@
           </a:prstGeom>
           <a:extLst>
             <a:ext uri="{C572A759-6A51-4108-AA02-DFA0A04FC94B}">
-              <ma14:wrappingTextBoxFlag xmlns:ma14="http://schemas.microsoft.com/office/mac/drawingml/2011/main" val="0"/>
+              <ma14:wrappingTextBoxFlag xmlns:ma14="http://schemas.microsoft.com/office/mac/drawingml/2011/main" xmlns="" val="0"/>
             </a:ext>
           </a:extLst>
         </p:spPr>
@@ -6266,7 +6041,7 @@
           <a:p>
             <a:pPr algn="r"/>
             <a:fld id="{F7021451-1387-4CA6-816F-3879F97B5CBC}" type="slidenum">
-              <a:rPr b="0" lang="en-US"/>
+              <a:rPr lang="en-US" b="0"/>
               <a:t>2</a:t>
             </a:fld>
             <a:endParaRPr lang="en-US"/>
@@ -6319,14 +6094,13 @@
           <a:bodyPr wrap="square" rtlCol="0"/>
           <a:lstStyle/>
           <a:p>
-            <a:pPr indent="0" marL="0">
+            <a:pPr marL="0" indent="0">
               <a:buNone/>
             </a:pPr>
             <a:r>
               <a:rPr lang="en-US" dirty="0"/>
               <a:t>La ciencia avanza por rupturas</a:t>
             </a:r>
-            <a:endParaRPr lang="en-US" dirty="0"/>
           </a:p>
         </p:txBody>
       </p:sp>
@@ -6378,11 +6152,11 @@
           <a:bodyPr wrap="square" lIns="0" tIns="0" rIns="0" bIns="0" rtlCol="0" anchor="t"/>
           <a:lstStyle/>
           <a:p>
-            <a:pPr indent="0" marL="0">
-              <a:buNone/>
-            </a:pPr>
-            <a:r>
-              <a:rPr lang="en-US" sz="1300" b="1" spc="200" kern="0" dirty="0">
+            <a:pPr marL="0" indent="0">
+              <a:buNone/>
+            </a:pPr>
+            <a:r>
+              <a:rPr lang="en-US" sz="1300" b="1" kern="0" spc="200" dirty="0">
                 <a:solidFill>
                   <a:schemeClr val="accent3"/>
                 </a:solidFill>
@@ -6417,7 +6191,7 @@
           <a:bodyPr wrap="square" lIns="0" tIns="0" rIns="0" bIns="0" rtlCol="0" anchor="t"/>
           <a:lstStyle/>
           <a:p>
-            <a:pPr indent="0" marL="0">
+            <a:pPr marL="0" indent="0">
               <a:buNone/>
             </a:pPr>
             <a:r>
@@ -6456,7 +6230,7 @@
           <a:bodyPr wrap="square" lIns="0" tIns="0" rIns="0" bIns="0" rtlCol="0" anchor="t"/>
           <a:lstStyle/>
           <a:p>
-            <a:pPr indent="0" marL="0">
+            <a:pPr marL="0" indent="0">
               <a:buNone/>
             </a:pPr>
             <a:r>
@@ -6549,7 +6323,7 @@
           <a:bodyPr wrap="square" lIns="0" tIns="0" rIns="0" bIns="0" rtlCol="0" anchor="ctr"/>
           <a:lstStyle/>
           <a:p>
-            <a:pPr algn="ctr" indent="0" marL="0">
+            <a:pPr marL="0" indent="0" algn="ctr">
               <a:buNone/>
             </a:pPr>
             <a:r>
@@ -6727,7 +6501,7 @@
           <a:bodyPr wrap="square" lIns="0" tIns="0" rIns="0" bIns="0" rtlCol="0" anchor="ctr"/>
           <a:lstStyle/>
           <a:p>
-            <a:pPr algn="ctr" indent="0" marL="0">
+            <a:pPr marL="0" indent="0" algn="ctr">
               <a:buNone/>
             </a:pPr>
             <a:r>
@@ -6850,7 +6624,7 @@
           </a:prstGeom>
           <a:extLst>
             <a:ext uri="{C572A759-6A51-4108-AA02-DFA0A04FC94B}">
-              <ma14:wrappingTextBoxFlag xmlns:ma14="http://schemas.microsoft.com/office/mac/drawingml/2011/main" val="0"/>
+              <ma14:wrappingTextBoxFlag xmlns:ma14="http://schemas.microsoft.com/office/mac/drawingml/2011/main" xmlns="" val="0"/>
             </a:ext>
           </a:extLst>
         </p:spPr>
@@ -6868,7 +6642,7 @@
           <a:p>
             <a:pPr algn="r"/>
             <a:fld id="{F7021451-1387-4CA6-816F-3879F97B5CBC}" type="slidenum">
-              <a:rPr b="0" lang="en-US"/>
+              <a:rPr lang="en-US" b="0"/>
               <a:t>3</a:t>
             </a:fld>
             <a:endParaRPr lang="en-US"/>
@@ -6921,14 +6695,13 @@
           <a:bodyPr wrap="square" rtlCol="0"/>
           <a:lstStyle/>
           <a:p>
-            <a:pPr indent="0" marL="0">
+            <a:pPr marL="0" indent="0">
               <a:buNone/>
             </a:pPr>
             <a:r>
               <a:rPr lang="en-US" dirty="0"/>
               <a:t>El ciclo de una revolución científica</a:t>
             </a:r>
-            <a:endParaRPr lang="en-US" dirty="0"/>
           </a:p>
         </p:txBody>
       </p:sp>
@@ -6978,7 +6751,7 @@
           <a:bodyPr wrap="square" lIns="0" tIns="0" rIns="0" bIns="0" rtlCol="0" anchor="ctr"/>
           <a:lstStyle/>
           <a:p>
-            <a:pPr indent="0" marL="0">
+            <a:pPr marL="0" indent="0">
               <a:buNone/>
             </a:pPr>
             <a:r>
@@ -7017,7 +6790,7 @@
           <a:bodyPr wrap="square" lIns="0" tIns="0" rIns="0" bIns="0" rtlCol="0" anchor="t"/>
           <a:lstStyle/>
           <a:p>
-            <a:pPr indent="0" marL="0">
+            <a:pPr marL="0" indent="0">
               <a:buNone/>
             </a:pPr>
             <a:r>
@@ -7081,7 +6854,7 @@
           <a:bodyPr wrap="square" lIns="0" tIns="0" rIns="0" bIns="0" rtlCol="0" anchor="ctr"/>
           <a:lstStyle/>
           <a:p>
-            <a:pPr indent="0" marL="0">
+            <a:pPr marL="0" indent="0">
               <a:buNone/>
             </a:pPr>
             <a:r>
@@ -7120,7 +6893,7 @@
           <a:bodyPr wrap="square" lIns="0" tIns="0" rIns="0" bIns="0" rtlCol="0" anchor="t"/>
           <a:lstStyle/>
           <a:p>
-            <a:pPr indent="0" marL="0">
+            <a:pPr marL="0" indent="0">
               <a:buNone/>
             </a:pPr>
             <a:r>
@@ -7184,7 +6957,7 @@
           <a:bodyPr wrap="square" lIns="0" tIns="0" rIns="0" bIns="0" rtlCol="0" anchor="ctr"/>
           <a:lstStyle/>
           <a:p>
-            <a:pPr indent="0" marL="0">
+            <a:pPr marL="0" indent="0">
               <a:buNone/>
             </a:pPr>
             <a:r>
@@ -7223,7 +6996,7 @@
           <a:bodyPr wrap="square" lIns="0" tIns="0" rIns="0" bIns="0" rtlCol="0" anchor="t"/>
           <a:lstStyle/>
           <a:p>
-            <a:pPr indent="0" marL="0">
+            <a:pPr marL="0" indent="0">
               <a:buNone/>
             </a:pPr>
             <a:r>
@@ -7287,7 +7060,7 @@
           <a:bodyPr wrap="square" lIns="0" tIns="0" rIns="0" bIns="0" rtlCol="0" anchor="ctr"/>
           <a:lstStyle/>
           <a:p>
-            <a:pPr indent="0" marL="0">
+            <a:pPr marL="0" indent="0">
               <a:buNone/>
             </a:pPr>
             <a:r>
@@ -7326,7 +7099,7 @@
           <a:bodyPr wrap="square" lIns="0" tIns="0" rIns="0" bIns="0" rtlCol="0" anchor="t"/>
           <a:lstStyle/>
           <a:p>
-            <a:pPr indent="0" marL="0">
+            <a:pPr marL="0" indent="0">
               <a:buNone/>
             </a:pPr>
             <a:r>
@@ -7390,7 +7163,7 @@
           <a:bodyPr wrap="square" lIns="0" tIns="0" rIns="0" bIns="0" rtlCol="0" anchor="ctr"/>
           <a:lstStyle/>
           <a:p>
-            <a:pPr indent="0" marL="0">
+            <a:pPr marL="0" indent="0">
               <a:buNone/>
             </a:pPr>
             <a:r>
@@ -7429,7 +7202,7 @@
           <a:bodyPr wrap="square" lIns="0" tIns="0" rIns="0" bIns="0" rtlCol="0" anchor="t"/>
           <a:lstStyle/>
           <a:p>
-            <a:pPr indent="0" marL="0">
+            <a:pPr marL="0" indent="0">
               <a:buNone/>
             </a:pPr>
             <a:r>
@@ -7495,7 +7268,7 @@
           <a:bodyPr wrap="square" lIns="0" tIns="0" rIns="0" bIns="0" rtlCol="0" anchor="ctr"/>
           <a:lstStyle/>
           <a:p>
-            <a:pPr indent="0" marL="0">
+            <a:pPr marL="0" indent="0">
               <a:buNone/>
             </a:pPr>
             <a:r>
@@ -7533,7 +7306,7 @@
           </a:prstGeom>
           <a:extLst>
             <a:ext uri="{C572A759-6A51-4108-AA02-DFA0A04FC94B}">
-              <ma14:wrappingTextBoxFlag xmlns:ma14="http://schemas.microsoft.com/office/mac/drawingml/2011/main" val="0"/>
+              <ma14:wrappingTextBoxFlag xmlns:ma14="http://schemas.microsoft.com/office/mac/drawingml/2011/main" xmlns="" val="0"/>
             </a:ext>
           </a:extLst>
         </p:spPr>
@@ -7551,7 +7324,7 @@
           <a:p>
             <a:pPr algn="r"/>
             <a:fld id="{F7021451-1387-4CA6-816F-3879F97B5CBC}" type="slidenum">
-              <a:rPr b="0" lang="en-US"/>
+              <a:rPr lang="en-US" b="0"/>
               <a:t>4</a:t>
             </a:fld>
             <a:endParaRPr lang="en-US"/>
@@ -7604,14 +7377,13 @@
           <a:bodyPr wrap="square" rtlCol="0"/>
           <a:lstStyle/>
           <a:p>
-            <a:pPr indent="0" marL="0">
+            <a:pPr marL="0" indent="0">
               <a:buNone/>
             </a:pPr>
             <a:r>
               <a:rPr lang="en-US" dirty="0"/>
               <a:t>Cuatro conceptos clave de Kuhn</a:t>
             </a:r>
-            <a:endParaRPr lang="en-US" dirty="0"/>
           </a:p>
         </p:txBody>
       </p:sp>
@@ -7688,7 +7460,7 @@
           <a:bodyPr wrap="square" lIns="0" tIns="0" rIns="0" bIns="0" rtlCol="0" anchor="t"/>
           <a:lstStyle/>
           <a:p>
-            <a:pPr indent="0" marL="0">
+            <a:pPr marL="0" indent="0">
               <a:buNone/>
             </a:pPr>
             <a:r>
@@ -7727,7 +7499,7 @@
           <a:bodyPr wrap="square" lIns="0" tIns="0" rIns="0" bIns="0" rtlCol="0" anchor="t"/>
           <a:lstStyle/>
           <a:p>
-            <a:pPr indent="0" marL="0">
+            <a:pPr marL="0" indent="0">
               <a:buNone/>
             </a:pPr>
             <a:r>
@@ -7818,7 +7590,7 @@
           <a:bodyPr wrap="square" lIns="0" tIns="0" rIns="0" bIns="0" rtlCol="0" anchor="t"/>
           <a:lstStyle/>
           <a:p>
-            <a:pPr indent="0" marL="0">
+            <a:pPr marL="0" indent="0">
               <a:buNone/>
             </a:pPr>
             <a:r>
@@ -7857,7 +7629,7 @@
           <a:bodyPr wrap="square" lIns="0" tIns="0" rIns="0" bIns="0" rtlCol="0" anchor="t"/>
           <a:lstStyle/>
           <a:p>
-            <a:pPr indent="0" marL="0">
+            <a:pPr marL="0" indent="0">
               <a:buNone/>
             </a:pPr>
             <a:r>
@@ -7948,7 +7720,7 @@
           <a:bodyPr wrap="square" lIns="0" tIns="0" rIns="0" bIns="0" rtlCol="0" anchor="t"/>
           <a:lstStyle/>
           <a:p>
-            <a:pPr indent="0" marL="0">
+            <a:pPr marL="0" indent="0">
               <a:buNone/>
             </a:pPr>
             <a:r>
@@ -7987,7 +7759,7 @@
           <a:bodyPr wrap="square" lIns="0" tIns="0" rIns="0" bIns="0" rtlCol="0" anchor="t"/>
           <a:lstStyle/>
           <a:p>
-            <a:pPr indent="0" marL="0">
+            <a:pPr marL="0" indent="0">
               <a:buNone/>
             </a:pPr>
             <a:r>
@@ -8078,7 +7850,7 @@
           <a:bodyPr wrap="square" lIns="0" tIns="0" rIns="0" bIns="0" rtlCol="0" anchor="t"/>
           <a:lstStyle/>
           <a:p>
-            <a:pPr indent="0" marL="0">
+            <a:pPr marL="0" indent="0">
               <a:buNone/>
             </a:pPr>
             <a:r>
@@ -8117,7 +7889,7 @@
           <a:bodyPr wrap="square" lIns="0" tIns="0" rIns="0" bIns="0" rtlCol="0" anchor="t"/>
           <a:lstStyle/>
           <a:p>
-            <a:pPr indent="0" marL="0">
+            <a:pPr marL="0" indent="0">
               <a:buNone/>
             </a:pPr>
             <a:r>
@@ -8156,7 +7928,7 @@
           <a:bodyPr wrap="square" lIns="0" tIns="0" rIns="0" bIns="0" rtlCol="0" anchor="t"/>
           <a:lstStyle/>
           <a:p>
-            <a:pPr indent="0" marL="0">
+            <a:pPr marL="0" indent="0">
               <a:buNone/>
             </a:pPr>
             <a:r>
@@ -8194,7 +7966,7 @@
           </a:prstGeom>
           <a:extLst>
             <a:ext uri="{C572A759-6A51-4108-AA02-DFA0A04FC94B}">
-              <ma14:wrappingTextBoxFlag xmlns:ma14="http://schemas.microsoft.com/office/mac/drawingml/2011/main" val="0"/>
+              <ma14:wrappingTextBoxFlag xmlns:ma14="http://schemas.microsoft.com/office/mac/drawingml/2011/main" xmlns="" val="0"/>
             </a:ext>
           </a:extLst>
         </p:spPr>
@@ -8212,7 +7984,7 @@
           <a:p>
             <a:pPr algn="r"/>
             <a:fld id="{F7021451-1387-4CA6-816F-3879F97B5CBC}" type="slidenum">
-              <a:rPr b="0" lang="en-US"/>
+              <a:rPr lang="en-US" b="0"/>
               <a:t>5</a:t>
             </a:fld>
             <a:endParaRPr lang="en-US"/>
@@ -8265,14 +8037,13 @@
           <a:bodyPr wrap="square" rtlCol="0"/>
           <a:lstStyle/>
           <a:p>
-            <a:pPr indent="0" marL="0">
+            <a:pPr marL="0" indent="0">
               <a:buNone/>
             </a:pPr>
             <a:r>
               <a:rPr lang="en-US" dirty="0"/>
               <a:t>Lectura crítica de la teoría</a:t>
             </a:r>
-            <a:endParaRPr lang="en-US" dirty="0"/>
           </a:p>
         </p:txBody>
       </p:sp>
@@ -8351,7 +8122,7 @@
           <a:bodyPr wrap="square" lIns="0" tIns="0" rIns="0" bIns="0" rtlCol="0" anchor="ctr"/>
           <a:lstStyle/>
           <a:p>
-            <a:pPr algn="ctr" indent="0" marL="0">
+            <a:pPr marL="0" indent="0" algn="ctr">
               <a:buNone/>
             </a:pPr>
             <a:r>
@@ -8390,7 +8161,7 @@
           <a:bodyPr wrap="square" lIns="0" tIns="0" rIns="0" bIns="0" rtlCol="0" anchor="ctr"/>
           <a:lstStyle/>
           <a:p>
-            <a:pPr indent="0" marL="0">
+            <a:pPr marL="0" indent="0">
               <a:buNone/>
             </a:pPr>
             <a:r>
@@ -8483,7 +8254,7 @@
           <a:bodyPr wrap="square" lIns="0" tIns="0" rIns="0" bIns="0" rtlCol="0" anchor="ctr"/>
           <a:lstStyle/>
           <a:p>
-            <a:pPr algn="ctr" indent="0" marL="0">
+            <a:pPr marL="0" indent="0" algn="ctr">
               <a:buNone/>
             </a:pPr>
             <a:r>
@@ -8522,7 +8293,7 @@
           <a:bodyPr wrap="square" lIns="0" tIns="0" rIns="0" bIns="0" rtlCol="0" anchor="ctr"/>
           <a:lstStyle/>
           <a:p>
-            <a:pPr indent="0" marL="0">
+            <a:pPr marL="0" indent="0">
               <a:buNone/>
             </a:pPr>
             <a:r>
@@ -8615,7 +8386,7 @@
           <a:bodyPr wrap="square" lIns="0" tIns="0" rIns="0" bIns="0" rtlCol="0" anchor="ctr"/>
           <a:lstStyle/>
           <a:p>
-            <a:pPr algn="ctr" indent="0" marL="0">
+            <a:pPr marL="0" indent="0" algn="ctr">
               <a:buNone/>
             </a:pPr>
             <a:r>
@@ -8654,7 +8425,7 @@
           <a:bodyPr wrap="square" lIns="0" tIns="0" rIns="0" bIns="0" rtlCol="0" anchor="ctr"/>
           <a:lstStyle/>
           <a:p>
-            <a:pPr indent="0" marL="0">
+            <a:pPr marL="0" indent="0">
               <a:buNone/>
             </a:pPr>
             <a:r>
@@ -8747,7 +8518,7 @@
           <a:bodyPr wrap="square" lIns="0" tIns="0" rIns="0" bIns="0" rtlCol="0" anchor="ctr"/>
           <a:lstStyle/>
           <a:p>
-            <a:pPr algn="ctr" indent="0" marL="0">
+            <a:pPr marL="0" indent="0" algn="ctr">
               <a:buNone/>
             </a:pPr>
             <a:r>
@@ -8786,7 +8557,7 @@
           <a:bodyPr wrap="square" lIns="0" tIns="0" rIns="0" bIns="0" rtlCol="0" anchor="ctr"/>
           <a:lstStyle/>
           <a:p>
-            <a:pPr indent="0" marL="0">
+            <a:pPr marL="0" indent="0">
               <a:buNone/>
             </a:pPr>
             <a:r>
@@ -8824,7 +8595,7 @@
           </a:prstGeom>
           <a:extLst>
             <a:ext uri="{C572A759-6A51-4108-AA02-DFA0A04FC94B}">
-              <ma14:wrappingTextBoxFlag xmlns:ma14="http://schemas.microsoft.com/office/mac/drawingml/2011/main" val="0"/>
+              <ma14:wrappingTextBoxFlag xmlns:ma14="http://schemas.microsoft.com/office/mac/drawingml/2011/main" xmlns="" val="0"/>
             </a:ext>
           </a:extLst>
         </p:spPr>
@@ -8842,7 +8613,7 @@
           <a:p>
             <a:pPr algn="r"/>
             <a:fld id="{F7021451-1387-4CA6-816F-3879F97B5CBC}" type="slidenum">
-              <a:rPr b="0" lang="en-US"/>
+              <a:rPr lang="en-US" b="0"/>
               <a:t>6</a:t>
             </a:fld>
             <a:endParaRPr lang="en-US"/>
@@ -8895,14 +8666,13 @@
           <a:bodyPr wrap="square" rtlCol="0"/>
           <a:lstStyle/>
           <a:p>
-            <a:pPr indent="0" marL="0">
+            <a:pPr marL="0" indent="0">
               <a:buNone/>
             </a:pPr>
             <a:r>
               <a:rPr lang="en-US" dirty="0"/>
               <a:t>Kuhn en la seguridad del software</a:t>
             </a:r>
-            <a:endParaRPr lang="en-US" dirty="0"/>
           </a:p>
         </p:txBody>
       </p:sp>
@@ -8922,15 +8692,27 @@
         </p:nvGraphicFramePr>
         <p:xfrm>
           <a:off x="548640" y="1508760"/>
-          <a:ext cx="11064240" cy="914400"/>
+          <a:ext cx="11064240" cy="4434840"/>
         </p:xfrm>
         <a:graphic>
           <a:graphicData uri="http://schemas.openxmlformats.org/drawingml/2006/table">
             <a:tbl>
               <a:tblPr/>
               <a:tblGrid>
-                <a:gridCol w="2743200"/>
-                <a:gridCol w="8321040"/>
+                <a:gridCol w="2743200">
+                  <a:extLst>
+                    <a:ext uri="{9D8B030D-6E8A-4147-A177-3AD203B41FA5}">
+                      <a16:colId xmlns:a16="http://schemas.microsoft.com/office/drawing/2014/main" val="20000"/>
+                    </a:ext>
+                  </a:extLst>
+                </a:gridCol>
+                <a:gridCol w="8321040">
+                  <a:extLst>
+                    <a:ext uri="{9D8B030D-6E8A-4147-A177-3AD203B41FA5}">
+                      <a16:colId xmlns:a16="http://schemas.microsoft.com/office/drawing/2014/main" val="20001"/>
+                    </a:ext>
+                  </a:extLst>
+                </a:gridCol>
               </a:tblGrid>
               <a:tr h="502920">
                 <a:tc>
@@ -8938,7 +8720,7 @@
                     <a:bodyPr/>
                     <a:lstStyle/>
                     <a:p>
-                      <a:pPr indent="0" marL="0">
+                      <a:pPr marL="0" indent="0">
                         <a:buNone/>
                       </a:pPr>
                       <a:r>
@@ -9006,7 +8788,7 @@
                     <a:bodyPr/>
                     <a:lstStyle/>
                     <a:p>
-                      <a:pPr indent="0" marL="0">
+                      <a:pPr marL="0" indent="0">
                         <a:buNone/>
                       </a:pPr>
                       <a:r>
@@ -9069,6 +8851,11 @@
                     </a:solidFill>
                   </a:tcPr>
                 </a:tc>
+                <a:extLst>
+                  <a:ext uri="{0D108BD9-81ED-4DB2-BD59-A6C34878D82A}">
+                    <a16:rowId xmlns:a16="http://schemas.microsoft.com/office/drawing/2014/main" val="10000"/>
+                  </a:ext>
+                </a:extLst>
               </a:tr>
               <a:tr h="731520">
                 <a:tc>
@@ -9076,7 +8863,7 @@
                     <a:bodyPr/>
                     <a:lstStyle/>
                     <a:p>
-                      <a:pPr indent="0" marL="0">
+                      <a:pPr marL="0" indent="0">
                         <a:buNone/>
                       </a:pPr>
                       <a:r>
@@ -9144,7 +8931,7 @@
                     <a:bodyPr/>
                     <a:lstStyle/>
                     <a:p>
-                      <a:pPr indent="0" marL="0">
+                      <a:pPr marL="0" indent="0">
                         <a:buNone/>
                       </a:pPr>
                       <a:r>
@@ -9207,6 +8994,11 @@
                     </a:solidFill>
                   </a:tcPr>
                 </a:tc>
+                <a:extLst>
+                  <a:ext uri="{0D108BD9-81ED-4DB2-BD59-A6C34878D82A}">
+                    <a16:rowId xmlns:a16="http://schemas.microsoft.com/office/drawing/2014/main" val="10001"/>
+                  </a:ext>
+                </a:extLst>
               </a:tr>
               <a:tr h="731520">
                 <a:tc>
@@ -9214,7 +9006,7 @@
                     <a:bodyPr/>
                     <a:lstStyle/>
                     <a:p>
-                      <a:pPr indent="0" marL="0">
+                      <a:pPr marL="0" indent="0">
                         <a:buNone/>
                       </a:pPr>
                       <a:r>
@@ -9282,7 +9074,7 @@
                     <a:bodyPr/>
                     <a:lstStyle/>
                     <a:p>
-                      <a:pPr indent="0" marL="0">
+                      <a:pPr marL="0" indent="0">
                         <a:buNone/>
                       </a:pPr>
                       <a:r>
@@ -9345,6 +9137,11 @@
                     </a:solidFill>
                   </a:tcPr>
                 </a:tc>
+                <a:extLst>
+                  <a:ext uri="{0D108BD9-81ED-4DB2-BD59-A6C34878D82A}">
+                    <a16:rowId xmlns:a16="http://schemas.microsoft.com/office/drawing/2014/main" val="10002"/>
+                  </a:ext>
+                </a:extLst>
               </a:tr>
               <a:tr h="868680">
                 <a:tc>
@@ -9352,7 +9149,7 @@
                     <a:bodyPr/>
                     <a:lstStyle/>
                     <a:p>
-                      <a:pPr indent="0" marL="0">
+                      <a:pPr marL="0" indent="0">
                         <a:buNone/>
                       </a:pPr>
                       <a:r>
@@ -9420,7 +9217,7 @@
                     <a:bodyPr/>
                     <a:lstStyle/>
                     <a:p>
-                      <a:pPr indent="0" marL="0">
+                      <a:pPr marL="0" indent="0">
                         <a:buNone/>
                       </a:pPr>
                       <a:r>
@@ -9483,6 +9280,11 @@
                     </a:solidFill>
                   </a:tcPr>
                 </a:tc>
+                <a:extLst>
+                  <a:ext uri="{0D108BD9-81ED-4DB2-BD59-A6C34878D82A}">
+                    <a16:rowId xmlns:a16="http://schemas.microsoft.com/office/drawing/2014/main" val="10003"/>
+                  </a:ext>
+                </a:extLst>
               </a:tr>
               <a:tr h="731520">
                 <a:tc>
@@ -9490,7 +9292,7 @@
                     <a:bodyPr/>
                     <a:lstStyle/>
                     <a:p>
-                      <a:pPr indent="0" marL="0">
+                      <a:pPr marL="0" indent="0">
                         <a:buNone/>
                       </a:pPr>
                       <a:r>
@@ -9558,7 +9360,7 @@
                     <a:bodyPr/>
                     <a:lstStyle/>
                     <a:p>
-                      <a:pPr indent="0" marL="0">
+                      <a:pPr marL="0" indent="0">
                         <a:buNone/>
                       </a:pPr>
                       <a:r>
@@ -9621,6 +9423,11 @@
                     </a:solidFill>
                   </a:tcPr>
                 </a:tc>
+                <a:extLst>
+                  <a:ext uri="{0D108BD9-81ED-4DB2-BD59-A6C34878D82A}">
+                    <a16:rowId xmlns:a16="http://schemas.microsoft.com/office/drawing/2014/main" val="10004"/>
+                  </a:ext>
+                </a:extLst>
               </a:tr>
               <a:tr h="868680">
                 <a:tc>
@@ -9628,7 +9435,7 @@
                     <a:bodyPr/>
                     <a:lstStyle/>
                     <a:p>
-                      <a:pPr indent="0" marL="0">
+                      <a:pPr marL="0" indent="0">
                         <a:buNone/>
                       </a:pPr>
                       <a:r>
@@ -9696,7 +9503,7 @@
                     <a:bodyPr/>
                     <a:lstStyle/>
                     <a:p>
-                      <a:pPr indent="0" marL="0">
+                      <a:pPr marL="0" indent="0">
                         <a:buNone/>
                       </a:pPr>
                       <a:r>
@@ -9759,6 +9566,11 @@
                     </a:solidFill>
                   </a:tcPr>
                 </a:tc>
+                <a:extLst>
+                  <a:ext uri="{0D108BD9-81ED-4DB2-BD59-A6C34878D82A}">
+                    <a16:rowId xmlns:a16="http://schemas.microsoft.com/office/drawing/2014/main" val="10005"/>
+                  </a:ext>
+                </a:extLst>
               </a:tr>
             </a:tbl>
           </a:graphicData>
@@ -9785,7 +9597,7 @@
           <a:bodyPr wrap="square" lIns="0" tIns="0" rIns="0" bIns="0" rtlCol="0" anchor="t"/>
           <a:lstStyle/>
           <a:p>
-            <a:pPr indent="0" marL="0">
+            <a:pPr marL="0" indent="0">
               <a:buNone/>
             </a:pPr>
             <a:r>
@@ -9823,7 +9635,7 @@
           </a:prstGeom>
           <a:extLst>
             <a:ext uri="{C572A759-6A51-4108-AA02-DFA0A04FC94B}">
-              <ma14:wrappingTextBoxFlag xmlns:ma14="http://schemas.microsoft.com/office/mac/drawingml/2011/main" val="0"/>
+              <ma14:wrappingTextBoxFlag xmlns:ma14="http://schemas.microsoft.com/office/mac/drawingml/2011/main" xmlns="" val="0"/>
             </a:ext>
           </a:extLst>
         </p:spPr>
@@ -9841,7 +9653,7 @@
           <a:p>
             <a:pPr algn="r"/>
             <a:fld id="{F7021451-1387-4CA6-816F-3879F97B5CBC}" type="slidenum">
-              <a:rPr b="0" lang="en-US"/>
+              <a:rPr lang="en-US" b="0"/>
               <a:t>7</a:t>
             </a:fld>
             <a:endParaRPr lang="en-US"/>
@@ -9894,14 +9706,13 @@
           <a:bodyPr wrap="square" rtlCol="0"/>
           <a:lstStyle/>
           <a:p>
-            <a:pPr indent="0" marL="0">
+            <a:pPr marL="0" indent="0">
               <a:buNone/>
             </a:pPr>
             <a:r>
               <a:rPr lang="en-US" dirty="0"/>
               <a:t>La crisis en cifras</a:t>
             </a:r>
-            <a:endParaRPr lang="en-US" dirty="0"/>
           </a:p>
         </p:txBody>
       </p:sp>
@@ -9953,7 +9764,7 @@
           <a:bodyPr wrap="square" lIns="0" tIns="0" rIns="0" bIns="0" rtlCol="0" anchor="t"/>
           <a:lstStyle/>
           <a:p>
-            <a:pPr indent="0" marL="0">
+            <a:pPr marL="0" indent="0">
               <a:buNone/>
             </a:pPr>
             <a:r>
@@ -9992,7 +9803,7 @@
           <a:bodyPr wrap="square" lIns="0" tIns="0" rIns="0" bIns="0" rtlCol="0" anchor="t"/>
           <a:lstStyle/>
           <a:p>
-            <a:pPr indent="0" marL="0">
+            <a:pPr marL="0" indent="0">
               <a:buNone/>
             </a:pPr>
             <a:r>
@@ -10031,7 +9842,7 @@
           <a:bodyPr wrap="square" lIns="0" tIns="0" rIns="0" bIns="0" rtlCol="0" anchor="t"/>
           <a:lstStyle/>
           <a:p>
-            <a:pPr indent="0" marL="0">
+            <a:pPr marL="0" indent="0">
               <a:buNone/>
             </a:pPr>
             <a:r>
@@ -10097,7 +9908,7 @@
           <a:bodyPr wrap="square" lIns="0" tIns="0" rIns="0" bIns="0" rtlCol="0" anchor="t"/>
           <a:lstStyle/>
           <a:p>
-            <a:pPr indent="0" marL="0">
+            <a:pPr marL="0" indent="0">
               <a:buNone/>
             </a:pPr>
             <a:r>
@@ -10136,7 +9947,7 @@
           <a:bodyPr wrap="square" lIns="0" tIns="0" rIns="0" bIns="0" rtlCol="0" anchor="t"/>
           <a:lstStyle/>
           <a:p>
-            <a:pPr indent="0" marL="0">
+            <a:pPr marL="0" indent="0">
               <a:buNone/>
             </a:pPr>
             <a:r>
@@ -10175,7 +9986,7 @@
           <a:bodyPr wrap="square" lIns="0" tIns="0" rIns="0" bIns="0" rtlCol="0" anchor="t"/>
           <a:lstStyle/>
           <a:p>
-            <a:pPr indent="0" marL="0">
+            <a:pPr marL="0" indent="0">
               <a:buNone/>
             </a:pPr>
             <a:r>
@@ -10241,7 +10052,7 @@
           <a:bodyPr wrap="square" lIns="0" tIns="0" rIns="0" bIns="0" rtlCol="0" anchor="t"/>
           <a:lstStyle/>
           <a:p>
-            <a:pPr indent="0" marL="0">
+            <a:pPr marL="0" indent="0">
               <a:buNone/>
             </a:pPr>
             <a:r>
@@ -10280,7 +10091,7 @@
           <a:bodyPr wrap="square" lIns="0" tIns="0" rIns="0" bIns="0" rtlCol="0" anchor="t"/>
           <a:lstStyle/>
           <a:p>
-            <a:pPr indent="0" marL="0">
+            <a:pPr marL="0" indent="0">
               <a:buNone/>
             </a:pPr>
             <a:r>
@@ -10319,7 +10130,7 @@
           <a:bodyPr wrap="square" lIns="0" tIns="0" rIns="0" bIns="0" rtlCol="0" anchor="t"/>
           <a:lstStyle/>
           <a:p>
-            <a:pPr indent="0" marL="0">
+            <a:pPr marL="0" indent="0">
               <a:buNone/>
             </a:pPr>
             <a:r>
@@ -10357,7 +10168,7 @@
           </a:prstGeom>
           <a:extLst>
             <a:ext uri="{C572A759-6A51-4108-AA02-DFA0A04FC94B}">
-              <ma14:wrappingTextBoxFlag xmlns:ma14="http://schemas.microsoft.com/office/mac/drawingml/2011/main" val="0"/>
+              <ma14:wrappingTextBoxFlag xmlns:ma14="http://schemas.microsoft.com/office/mac/drawingml/2011/main" xmlns="" val="0"/>
             </a:ext>
           </a:extLst>
         </p:spPr>
@@ -10375,7 +10186,7 @@
           <a:p>
             <a:pPr algn="r"/>
             <a:fld id="{F7021451-1387-4CA6-816F-3879F97B5CBC}" type="slidenum">
-              <a:rPr b="0" lang="en-US"/>
+              <a:rPr lang="en-US" b="0"/>
               <a:t>8</a:t>
             </a:fld>
             <a:endParaRPr lang="en-US"/>
@@ -10428,14 +10239,13 @@
           <a:bodyPr wrap="square" rtlCol="0"/>
           <a:lstStyle/>
           <a:p>
-            <a:pPr indent="0" marL="0">
+            <a:pPr marL="0" indent="0">
               <a:buNone/>
             </a:pPr>
             <a:r>
               <a:rPr lang="en-US" dirty="0"/>
               <a:t>Del paradigma al problema de estudio</a:t>
             </a:r>
-            <a:endParaRPr lang="en-US" dirty="0"/>
           </a:p>
         </p:txBody>
       </p:sp>
@@ -10514,7 +10324,7 @@
           <a:bodyPr wrap="square" lIns="0" tIns="0" rIns="0" bIns="0" rtlCol="0" anchor="ctr"/>
           <a:lstStyle/>
           <a:p>
-            <a:pPr algn="ctr" indent="0" marL="0">
+            <a:pPr marL="0" indent="0" algn="ctr">
               <a:buNone/>
             </a:pPr>
             <a:r>
@@ -10531,7 +10341,7 @@
             <a:endParaRPr lang="en-US" sz="1600" dirty="0"/>
           </a:p>
           <a:p>
-            <a:pPr algn="ctr" indent="0" marL="0">
+            <a:pPr marL="0" indent="0" algn="ctr">
               <a:buNone/>
             </a:pPr>
             <a:r>
@@ -10570,7 +10380,7 @@
           <a:bodyPr wrap="square" lIns="0" tIns="0" rIns="0" bIns="0" rtlCol="0" anchor="ctr"/>
           <a:lstStyle/>
           <a:p>
-            <a:pPr indent="0" marL="0">
+            <a:pPr marL="0" indent="0">
               <a:buNone/>
             </a:pPr>
             <a:r>
@@ -10663,7 +10473,7 @@
           <a:bodyPr wrap="square" lIns="0" tIns="0" rIns="0" bIns="0" rtlCol="0" anchor="ctr"/>
           <a:lstStyle/>
           <a:p>
-            <a:pPr algn="ctr" indent="0" marL="0">
+            <a:pPr marL="0" indent="0" algn="ctr">
               <a:buNone/>
             </a:pPr>
             <a:r>
@@ -10680,7 +10490,7 @@
             <a:endParaRPr lang="en-US" sz="1600" dirty="0"/>
           </a:p>
           <a:p>
-            <a:pPr algn="ctr" indent="0" marL="0">
+            <a:pPr marL="0" indent="0" algn="ctr">
               <a:buNone/>
             </a:pPr>
             <a:r>
@@ -10719,7 +10529,7 @@
           <a:bodyPr wrap="square" lIns="0" tIns="0" rIns="0" bIns="0" rtlCol="0" anchor="ctr"/>
           <a:lstStyle/>
           <a:p>
-            <a:pPr indent="0" marL="0">
+            <a:pPr marL="0" indent="0">
               <a:buNone/>
             </a:pPr>
             <a:r>
@@ -10812,7 +10622,7 @@
           <a:bodyPr wrap="square" lIns="0" tIns="0" rIns="0" bIns="0" rtlCol="0" anchor="ctr"/>
           <a:lstStyle/>
           <a:p>
-            <a:pPr algn="ctr" indent="0" marL="0">
+            <a:pPr marL="0" indent="0" algn="ctr">
               <a:buNone/>
             </a:pPr>
             <a:r>
@@ -10829,7 +10639,7 @@
             <a:endParaRPr lang="en-US" sz="1600" dirty="0"/>
           </a:p>
           <a:p>
-            <a:pPr algn="ctr" indent="0" marL="0">
+            <a:pPr marL="0" indent="0" algn="ctr">
               <a:buNone/>
             </a:pPr>
             <a:r>
@@ -10868,7 +10678,7 @@
           <a:bodyPr wrap="square" lIns="0" tIns="0" rIns="0" bIns="0" rtlCol="0" anchor="ctr"/>
           <a:lstStyle/>
           <a:p>
-            <a:pPr indent="0" marL="0">
+            <a:pPr marL="0" indent="0">
               <a:buNone/>
             </a:pPr>
             <a:r>
@@ -10906,7 +10716,7 @@
           </a:prstGeom>
           <a:extLst>
             <a:ext uri="{C572A759-6A51-4108-AA02-DFA0A04FC94B}">
-              <ma14:wrappingTextBoxFlag xmlns:ma14="http://schemas.microsoft.com/office/mac/drawingml/2011/main" val="0"/>
+              <ma14:wrappingTextBoxFlag xmlns:ma14="http://schemas.microsoft.com/office/mac/drawingml/2011/main" xmlns="" val="0"/>
             </a:ext>
           </a:extLst>
         </p:spPr>
@@ -10924,7 +10734,7 @@
           <a:p>
             <a:pPr algn="r"/>
             <a:fld id="{F7021451-1387-4CA6-816F-3879F97B5CBC}" type="slidenum">
-              <a:rPr b="0" lang="en-US"/>
+              <a:rPr lang="en-US" b="0"/>
               <a:t>9</a:t>
             </a:fld>
             <a:endParaRPr lang="en-US"/>
@@ -11232,4 +11042,299 @@
     </a:ext>
   </a:extLst>
 </a:theme>
+</file>
+
+<file path=ppt/theme/theme2.xml><?xml version="1.0" encoding="utf-8"?>
+<a:theme xmlns:a="http://schemas.openxmlformats.org/drawingml/2006/main" name="Tema de Office">
+  <a:themeElements>
+    <a:clrScheme name="Office">
+      <a:dk1>
+        <a:sysClr val="windowText" lastClr="000000"/>
+      </a:dk1>
+      <a:lt1>
+        <a:sysClr val="window" lastClr="FFFFFF"/>
+      </a:lt1>
+      <a:dk2>
+        <a:srgbClr val="44546A"/>
+      </a:dk2>
+      <a:lt2>
+        <a:srgbClr val="E7E6E6"/>
+      </a:lt2>
+      <a:accent1>
+        <a:srgbClr val="4472C4"/>
+      </a:accent1>
+      <a:accent2>
+        <a:srgbClr val="ED7D31"/>
+      </a:accent2>
+      <a:accent3>
+        <a:srgbClr val="A5A5A5"/>
+      </a:accent3>
+      <a:accent4>
+        <a:srgbClr val="FFC000"/>
+      </a:accent4>
+      <a:accent5>
+        <a:srgbClr val="5B9BD5"/>
+      </a:accent5>
+      <a:accent6>
+        <a:srgbClr val="70AD47"/>
+      </a:accent6>
+      <a:hlink>
+        <a:srgbClr val="0563C1"/>
+      </a:hlink>
+      <a:folHlink>
+        <a:srgbClr val="954F72"/>
+      </a:folHlink>
+    </a:clrScheme>
+    <a:fontScheme name="Office">
+      <a:majorFont>
+        <a:latin typeface="Calibri Light" panose="020F0302020204030204"/>
+        <a:ea typeface=""/>
+        <a:cs typeface=""/>
+        <a:font script="Jpan" typeface="游ゴシック Light"/>
+        <a:font script="Hang" typeface="맑은 고딕"/>
+        <a:font script="Hans" typeface="等线 Light"/>
+        <a:font script="Hant" typeface="新細明體"/>
+        <a:font script="Arab" typeface="Times New Roman"/>
+        <a:font script="Hebr" typeface="Times New Roman"/>
+        <a:font script="Thai" typeface="Angsana New"/>
+        <a:font script="Ethi" typeface="Nyala"/>
+        <a:font script="Beng" typeface="Vrinda"/>
+        <a:font script="Gujr" typeface="Shruti"/>
+        <a:font script="Khmr" typeface="MoolBoran"/>
+        <a:font script="Knda" typeface="Tunga"/>
+        <a:font script="Guru" typeface="Raavi"/>
+        <a:font script="Cans" typeface="Euphemia"/>
+        <a:font script="Cher" typeface="Plantagenet Cherokee"/>
+        <a:font script="Yiii" typeface="Microsoft Yi Baiti"/>
+        <a:font script="Tibt" typeface="Microsoft Himalaya"/>
+        <a:font script="Thaa" typeface="MV Boli"/>
+        <a:font script="Deva" typeface="Mangal"/>
+        <a:font script="Telu" typeface="Gautami"/>
+        <a:font script="Taml" typeface="Latha"/>
+        <a:font script="Syrc" typeface="Estrangelo Edessa"/>
+        <a:font script="Orya" typeface="Kalinga"/>
+        <a:font script="Mlym" typeface="Kartika"/>
+        <a:font script="Laoo" typeface="DokChampa"/>
+        <a:font script="Sinh" typeface="Iskoola Pota"/>
+        <a:font script="Mong" typeface="Mongolian Baiti"/>
+        <a:font script="Viet" typeface="Times New Roman"/>
+        <a:font script="Uigh" typeface="Microsoft Uighur"/>
+        <a:font script="Geor" typeface="Sylfaen"/>
+        <a:font script="Armn" typeface="Arial"/>
+        <a:font script="Bugi" typeface="Leelawadee UI"/>
+        <a:font script="Bopo" typeface="Microsoft JhengHei"/>
+        <a:font script="Java" typeface="Javanese Text"/>
+        <a:font script="Lisu" typeface="Segoe UI"/>
+        <a:font script="Mymr" typeface="Myanmar Text"/>
+        <a:font script="Nkoo" typeface="Ebrima"/>
+        <a:font script="Olck" typeface="Nirmala UI"/>
+        <a:font script="Osma" typeface="Ebrima"/>
+        <a:font script="Phag" typeface="Phagspa"/>
+        <a:font script="Syrn" typeface="Estrangelo Edessa"/>
+        <a:font script="Syrj" typeface="Estrangelo Edessa"/>
+        <a:font script="Syre" typeface="Estrangelo Edessa"/>
+        <a:font script="Sora" typeface="Nirmala UI"/>
+        <a:font script="Tale" typeface="Microsoft Tai Le"/>
+        <a:font script="Talu" typeface="Microsoft New Tai Lue"/>
+        <a:font script="Tfng" typeface="Ebrima"/>
+      </a:majorFont>
+      <a:minorFont>
+        <a:latin typeface="Calibri" panose="020F0502020204030204"/>
+        <a:ea typeface=""/>
+        <a:cs typeface=""/>
+        <a:font script="Jpan" typeface="游ゴシック"/>
+        <a:font script="Hang" typeface="맑은 고딕"/>
+        <a:font script="Hans" typeface="等线"/>
+        <a:font script="Hant" typeface="新細明體"/>
+        <a:font script="Arab" typeface="Arial"/>
+        <a:font script="Hebr" typeface="Arial"/>
+        <a:font script="Thai" typeface="Cordia New"/>
+        <a:font script="Ethi" typeface="Nyala"/>
+        <a:font script="Beng" typeface="Vrinda"/>
+        <a:font script="Gujr" typeface="Shruti"/>
+        <a:font script="Khmr" typeface="DaunPenh"/>
+        <a:font script="Knda" typeface="Tunga"/>
+        <a:font script="Guru" typeface="Raavi"/>
+        <a:font script="Cans" typeface="Euphemia"/>
+        <a:font script="Cher" typeface="Plantagenet Cherokee"/>
+        <a:font script="Yiii" typeface="Microsoft Yi Baiti"/>
+        <a:font script="Tibt" typeface="Microsoft Himalaya"/>
+        <a:font script="Thaa" typeface="MV Boli"/>
+        <a:font script="Deva" typeface="Mangal"/>
+        <a:font script="Telu" typeface="Gautami"/>
+        <a:font script="Taml" typeface="Latha"/>
+        <a:font script="Syrc" typeface="Estrangelo Edessa"/>
+        <a:font script="Orya" typeface="Kalinga"/>
+        <a:font script="Mlym" typeface="Kartika"/>
+        <a:font script="Laoo" typeface="DokChampa"/>
+        <a:font script="Sinh" typeface="Iskoola Pota"/>
+        <a:font script="Mong" typeface="Mongolian Baiti"/>
+        <a:font script="Viet" typeface="Arial"/>
+        <a:font script="Uigh" typeface="Microsoft Uighur"/>
+        <a:font script="Geor" typeface="Sylfaen"/>
+        <a:font script="Armn" typeface="Arial"/>
+        <a:font script="Bugi" typeface="Leelawadee UI"/>
+        <a:font script="Bopo" typeface="Microsoft JhengHei"/>
+        <a:font script="Java" typeface="Javanese Text"/>
+        <a:font script="Lisu" typeface="Segoe UI"/>
+        <a:font script="Mymr" typeface="Myanmar Text"/>
+        <a:font script="Nkoo" typeface="Ebrima"/>
+        <a:font script="Olck" typeface="Nirmala UI"/>
+        <a:font script="Osma" typeface="Ebrima"/>
+        <a:font script="Phag" typeface="Phagspa"/>
+        <a:font script="Syrn" typeface="Estrangelo Edessa"/>
+        <a:font script="Syrj" typeface="Estrangelo Edessa"/>
+        <a:font script="Syre" typeface="Estrangelo Edessa"/>
+        <a:font script="Sora" typeface="Nirmala UI"/>
+        <a:font script="Tale" typeface="Microsoft Tai Le"/>
+        <a:font script="Talu" typeface="Microsoft New Tai Lue"/>
+        <a:font script="Tfng" typeface="Ebrima"/>
+      </a:minorFont>
+    </a:fontScheme>
+    <a:fmtScheme name="Office">
+      <a:fillStyleLst>
+        <a:solidFill>
+          <a:schemeClr val="phClr"/>
+        </a:solidFill>
+        <a:gradFill rotWithShape="1">
+          <a:gsLst>
+            <a:gs pos="0">
+              <a:schemeClr val="phClr">
+                <a:lumMod val="110000"/>
+                <a:satMod val="105000"/>
+                <a:tint val="67000"/>
+              </a:schemeClr>
+            </a:gs>
+            <a:gs pos="50000">
+              <a:schemeClr val="phClr">
+                <a:lumMod val="105000"/>
+                <a:satMod val="103000"/>
+                <a:tint val="73000"/>
+              </a:schemeClr>
+            </a:gs>
+            <a:gs pos="100000">
+              <a:schemeClr val="phClr">
+                <a:lumMod val="105000"/>
+                <a:satMod val="109000"/>
+                <a:tint val="81000"/>
+              </a:schemeClr>
+            </a:gs>
+          </a:gsLst>
+          <a:lin ang="5400000" scaled="0"/>
+        </a:gradFill>
+        <a:gradFill rotWithShape="1">
+          <a:gsLst>
+            <a:gs pos="0">
+              <a:schemeClr val="phClr">
+                <a:satMod val="103000"/>
+                <a:lumMod val="102000"/>
+                <a:tint val="94000"/>
+              </a:schemeClr>
+            </a:gs>
+            <a:gs pos="50000">
+              <a:schemeClr val="phClr">
+                <a:satMod val="110000"/>
+                <a:lumMod val="100000"/>
+                <a:shade val="100000"/>
+              </a:schemeClr>
+            </a:gs>
+            <a:gs pos="100000">
+              <a:schemeClr val="phClr">
+                <a:lumMod val="99000"/>
+                <a:satMod val="120000"/>
+                <a:shade val="78000"/>
+              </a:schemeClr>
+            </a:gs>
+          </a:gsLst>
+          <a:lin ang="5400000" scaled="0"/>
+        </a:gradFill>
+      </a:fillStyleLst>
+      <a:lnStyleLst>
+        <a:ln w="6350" cap="flat" cmpd="sng" algn="ctr">
+          <a:solidFill>
+            <a:schemeClr val="phClr"/>
+          </a:solidFill>
+          <a:prstDash val="solid"/>
+          <a:miter lim="800000"/>
+        </a:ln>
+        <a:ln w="12700" cap="flat" cmpd="sng" algn="ctr">
+          <a:solidFill>
+            <a:schemeClr val="phClr"/>
+          </a:solidFill>
+          <a:prstDash val="solid"/>
+          <a:miter lim="800000"/>
+        </a:ln>
+        <a:ln w="19050" cap="flat" cmpd="sng" algn="ctr">
+          <a:solidFill>
+            <a:schemeClr val="phClr"/>
+          </a:solidFill>
+          <a:prstDash val="solid"/>
+          <a:miter lim="800000"/>
+        </a:ln>
+      </a:lnStyleLst>
+      <a:effectStyleLst>
+        <a:effectStyle>
+          <a:effectLst/>
+        </a:effectStyle>
+        <a:effectStyle>
+          <a:effectLst/>
+        </a:effectStyle>
+        <a:effectStyle>
+          <a:effectLst>
+            <a:outerShdw blurRad="57150" dist="19050" dir="5400000" algn="ctr" rotWithShape="0">
+              <a:srgbClr val="000000">
+                <a:alpha val="63000"/>
+              </a:srgbClr>
+            </a:outerShdw>
+          </a:effectLst>
+        </a:effectStyle>
+      </a:effectStyleLst>
+      <a:bgFillStyleLst>
+        <a:solidFill>
+          <a:schemeClr val="phClr"/>
+        </a:solidFill>
+        <a:solidFill>
+          <a:schemeClr val="phClr">
+            <a:tint val="95000"/>
+            <a:satMod val="170000"/>
+          </a:schemeClr>
+        </a:solidFill>
+        <a:gradFill rotWithShape="1">
+          <a:gsLst>
+            <a:gs pos="0">
+              <a:schemeClr val="phClr">
+                <a:tint val="93000"/>
+                <a:satMod val="150000"/>
+                <a:shade val="98000"/>
+                <a:lumMod val="102000"/>
+              </a:schemeClr>
+            </a:gs>
+            <a:gs pos="50000">
+              <a:schemeClr val="phClr">
+                <a:tint val="98000"/>
+                <a:satMod val="130000"/>
+                <a:shade val="90000"/>
+                <a:lumMod val="103000"/>
+              </a:schemeClr>
+            </a:gs>
+            <a:gs pos="100000">
+              <a:schemeClr val="phClr">
+                <a:shade val="63000"/>
+                <a:satMod val="120000"/>
+              </a:schemeClr>
+            </a:gs>
+          </a:gsLst>
+          <a:lin ang="5400000" scaled="0"/>
+        </a:gradFill>
+      </a:bgFillStyleLst>
+    </a:fmtScheme>
+  </a:themeElements>
+  <a:objectDefaults/>
+  <a:extraClrSchemeLst/>
+  <a:extLst>
+    <a:ext uri="{05A4C25C-085E-4340-85A3-A5531E510DB2}">
+      <thm15:themeFamily xmlns:thm15="http://schemas.microsoft.com/office/thememl/2012/main" name="Office Theme" id="{62F939B6-93AF-4DB8-9C6B-D6C7DFDC589F}" vid="{4A3C46E8-61CC-4603-A589-7422A47A8E4A}"/>
+    </a:ext>
+  </a:extLst>
+</a:theme>
 </file>